--- a/public/lessons/year-6-maths/summer/week-24/find-the-area-of-triangles/teaching-powerpoint-v1.pptx
+++ b/public/lessons/year-6-maths/summer/week-24/find-the-area-of-triangles/teaching-powerpoint-v1.pptx
@@ -2,24 +2,24 @@
 <file path=ppt/presentation.xml><?xml version="1.0" encoding="utf-8"?>
 <p:presentation xmlns:p="http://schemas.openxmlformats.org/presentationml/2006/main">
   <p:sldMasterIdLst>
-    <p:sldMasterId xmlns:r="http://schemas.openxmlformats.org/officeDocument/2006/relationships" id="2147483648" r:id="Rd796e762b928424f"/>
+    <p:sldMasterId xmlns:r="http://schemas.openxmlformats.org/officeDocument/2006/relationships" id="2147483648" r:id="Rda4d9586a1684191"/>
   </p:sldMasterIdLst>
   <p:notesMasterIdLst>
-    <p:notesMasterId xmlns:r="http://schemas.openxmlformats.org/officeDocument/2006/relationships" r:id="Rbcd84e3a0e454767"/>
+    <p:notesMasterId xmlns:r="http://schemas.openxmlformats.org/officeDocument/2006/relationships" r:id="Rb747f36fd96f45af"/>
   </p:notesMasterIdLst>
   <p:sldIdLst>
-    <p:sldId xmlns:r="http://schemas.openxmlformats.org/officeDocument/2006/relationships" id="256" r:id="Rebe650df151e4b2e"/>
-    <p:sldId xmlns:r="http://schemas.openxmlformats.org/officeDocument/2006/relationships" id="257" r:id="R0bf08d256d4d4176"/>
-    <p:sldId xmlns:r="http://schemas.openxmlformats.org/officeDocument/2006/relationships" id="258" r:id="Rcca3ad61b16b4715"/>
-    <p:sldId xmlns:r="http://schemas.openxmlformats.org/officeDocument/2006/relationships" id="259" r:id="R953b19bc287e46e6"/>
-    <p:sldId xmlns:r="http://schemas.openxmlformats.org/officeDocument/2006/relationships" id="260" r:id="Rb9d6897f2f274f59"/>
-    <p:sldId xmlns:r="http://schemas.openxmlformats.org/officeDocument/2006/relationships" id="261" r:id="Red1f4b6764fc4d53"/>
-    <p:sldId xmlns:r="http://schemas.openxmlformats.org/officeDocument/2006/relationships" id="262" r:id="R92f5929ce30c46e2"/>
-    <p:sldId xmlns:r="http://schemas.openxmlformats.org/officeDocument/2006/relationships" id="263" r:id="R9d6beceeb1bc402e"/>
-    <p:sldId xmlns:r="http://schemas.openxmlformats.org/officeDocument/2006/relationships" id="264" r:id="Rf4f802d0b8c64dc1"/>
-    <p:sldId xmlns:r="http://schemas.openxmlformats.org/officeDocument/2006/relationships" id="265" r:id="R65f09ef39838498e"/>
-    <p:sldId xmlns:r="http://schemas.openxmlformats.org/officeDocument/2006/relationships" id="266" r:id="R6559a566a15b4dbe"/>
-    <p:sldId xmlns:r="http://schemas.openxmlformats.org/officeDocument/2006/relationships" id="267" r:id="R993b508aaaca476b"/>
+    <p:sldId xmlns:r="http://schemas.openxmlformats.org/officeDocument/2006/relationships" id="256" r:id="R3c4904ea725e4418"/>
+    <p:sldId xmlns:r="http://schemas.openxmlformats.org/officeDocument/2006/relationships" id="257" r:id="Rbd11a659f29f4c1e"/>
+    <p:sldId xmlns:r="http://schemas.openxmlformats.org/officeDocument/2006/relationships" id="258" r:id="Ra4c242a0d5cd4d1a"/>
+    <p:sldId xmlns:r="http://schemas.openxmlformats.org/officeDocument/2006/relationships" id="259" r:id="Ra920d4a69c1b4bd3"/>
+    <p:sldId xmlns:r="http://schemas.openxmlformats.org/officeDocument/2006/relationships" id="260" r:id="R81e7586604ee4d75"/>
+    <p:sldId xmlns:r="http://schemas.openxmlformats.org/officeDocument/2006/relationships" id="261" r:id="Rf327187cd4204e02"/>
+    <p:sldId xmlns:r="http://schemas.openxmlformats.org/officeDocument/2006/relationships" id="262" r:id="R62c2599e371e4353"/>
+    <p:sldId xmlns:r="http://schemas.openxmlformats.org/officeDocument/2006/relationships" id="263" r:id="R24340754a5f94d76"/>
+    <p:sldId xmlns:r="http://schemas.openxmlformats.org/officeDocument/2006/relationships" id="264" r:id="R3dcaa610013a4979"/>
+    <p:sldId xmlns:r="http://schemas.openxmlformats.org/officeDocument/2006/relationships" id="265" r:id="R35abf5c039ea4057"/>
+    <p:sldId xmlns:r="http://schemas.openxmlformats.org/officeDocument/2006/relationships" id="266" r:id="R9012fccd753a48fc"/>
+    <p:sldId xmlns:r="http://schemas.openxmlformats.org/officeDocument/2006/relationships" id="267" r:id="Reeccc7063f564f31"/>
   </p:sldIdLst>
   <p:sldSz cx="12192000" cy="6858000"/>
   <p:notesSz cx="6858000" cy="9144000"/>
@@ -873,7 +873,7 @@
           <a:lstStyle xmlns:a="http://schemas.openxmlformats.org/drawingml/2006/main"/>
           <a:p xmlns:a="http://schemas.openxmlformats.org/drawingml/2006/main">
             <a:r>
-              <a:t>I do. Reveal the question, setup and each calculation stage one click at a time. Pupils watch before copying. Model answer: 60 cm2.</a:t>
+              <a:t>I do. Reveal the question, then reveal each mathematical change one click at a time. Point to the numbers and operation that changed before moving to the next line. Final answer: 60 cm2.</a:t>
             </a:r>
           </a:p>
         </p:txBody>
@@ -1291,7 +1291,7 @@
   </p:cSld>
   <p:clrMap bg1="lt1" tx1="dk1" bg2="lt2" tx2="dk2" accent1="accent1" accent2="accent2" accent3="accent3" accent4="accent4" accent5="accent5" accent6="accent6" hlink="hlink" folHlink="folHlink"/>
   <p:sldLayoutIdLst>
-    <p:sldLayoutId xmlns:r="http://schemas.openxmlformats.org/officeDocument/2006/relationships" id="2147483649" r:id="R0535a9281c4d4e81"/>
+    <p:sldLayoutId xmlns:r="http://schemas.openxmlformats.org/officeDocument/2006/relationships" id="2147483649" r:id="Ref7761c126fd406a"/>
   </p:sldLayoutIdLst>
   <p:txStyles>
     <p:titleStyle>
@@ -1842,7 +1842,7 @@
           <p:cNvPr id="12" name="">
             <a:extLst xmlns:a="http://schemas.openxmlformats.org/drawingml/2006/main">
               <a:ext uri="{FF2B5EF4-FFF2-40B4-BE49-F238E27FC236}">
-                <a16:creationId xmlns:a16="http://schemas.microsoft.com/office/drawing/2014/main" id="{1C47478F-08D1-48DF-A2E9-8AA77D79C311}"/>
+                <a16:creationId xmlns:a16="http://schemas.microsoft.com/office/drawing/2014/main" id="{9167DFB4-43EF-4111-A74A-B8989F0DA2E6}"/>
               </a:ext>
             </a:extLst>
           </p:cNvPr>
@@ -1874,7 +1874,7 @@
           <p:cNvPr id="2" name="">
             <a:extLst xmlns:a="http://schemas.openxmlformats.org/drawingml/2006/main">
               <a:ext uri="{FF2B5EF4-FFF2-40B4-BE49-F238E27FC236}">
-                <a16:creationId xmlns:a16="http://schemas.microsoft.com/office/drawing/2014/main" id="{567024A1-B893-4429-8E16-AA18C4B22F7D}"/>
+                <a16:creationId xmlns:a16="http://schemas.microsoft.com/office/drawing/2014/main" id="{901229AB-C0B6-4FA4-A74E-7250B38C5F08}"/>
               </a:ext>
             </a:extLst>
           </p:cNvPr>
@@ -1931,7 +1931,7 @@
           <p:cNvPr id="3" name="">
             <a:extLst xmlns:a="http://schemas.openxmlformats.org/drawingml/2006/main">
               <a:ext uri="{FF2B5EF4-FFF2-40B4-BE49-F238E27FC236}">
-                <a16:creationId xmlns:a16="http://schemas.microsoft.com/office/drawing/2014/main" id="{22D4826B-C42F-491D-BA13-4C760CC4E833}"/>
+                <a16:creationId xmlns:a16="http://schemas.microsoft.com/office/drawing/2014/main" id="{C6599565-27FB-4D0C-9F7B-C7F2ADF9890C}"/>
               </a:ext>
             </a:extLst>
           </p:cNvPr>
@@ -1965,7 +1965,7 @@
           <p:cNvPr id="4" name="">
             <a:extLst xmlns:a="http://schemas.openxmlformats.org/drawingml/2006/main">
               <a:ext uri="{FF2B5EF4-FFF2-40B4-BE49-F238E27FC236}">
-                <a16:creationId xmlns:a16="http://schemas.microsoft.com/office/drawing/2014/main" id="{DAD99D0B-9124-44F8-812B-1738345762F5}"/>
+                <a16:creationId xmlns:a16="http://schemas.microsoft.com/office/drawing/2014/main" id="{195BE911-E3A1-4AD4-9BEE-114989424C07}"/>
               </a:ext>
             </a:extLst>
           </p:cNvPr>
@@ -2022,7 +2022,7 @@
           <p:cNvPr id="5" name="">
             <a:extLst xmlns:a="http://schemas.openxmlformats.org/drawingml/2006/main">
               <a:ext uri="{FF2B5EF4-FFF2-40B4-BE49-F238E27FC236}">
-                <a16:creationId xmlns:a16="http://schemas.microsoft.com/office/drawing/2014/main" id="{D2725570-49E2-4B57-BDD1-ACC7B3E60DCF}"/>
+                <a16:creationId xmlns:a16="http://schemas.microsoft.com/office/drawing/2014/main" id="{36383F28-CC6E-40C8-9A41-538C21C657EB}"/>
               </a:ext>
             </a:extLst>
           </p:cNvPr>
@@ -2079,7 +2079,7 @@
           <p:cNvPr id="6" name="">
             <a:extLst xmlns:a="http://schemas.openxmlformats.org/drawingml/2006/main">
               <a:ext uri="{FF2B5EF4-FFF2-40B4-BE49-F238E27FC236}">
-                <a16:creationId xmlns:a16="http://schemas.microsoft.com/office/drawing/2014/main" id="{F56D0C82-7904-4F9C-94FC-00356F2987D4}"/>
+                <a16:creationId xmlns:a16="http://schemas.microsoft.com/office/drawing/2014/main" id="{5218454A-BABF-4CD4-9AD5-7F6493B56395}"/>
               </a:ext>
             </a:extLst>
           </p:cNvPr>
@@ -2113,7 +2113,7 @@
           <p:cNvPr id="7" name="">
             <a:extLst xmlns:a="http://schemas.openxmlformats.org/drawingml/2006/main">
               <a:ext uri="{FF2B5EF4-FFF2-40B4-BE49-F238E27FC236}">
-                <a16:creationId xmlns:a16="http://schemas.microsoft.com/office/drawing/2014/main" id="{494D7AA1-00D2-4EE8-94AF-65F502809351}"/>
+                <a16:creationId xmlns:a16="http://schemas.microsoft.com/office/drawing/2014/main" id="{F0D3DA65-3DD8-4D5D-A074-D4DB6758FE1B}"/>
               </a:ext>
             </a:extLst>
           </p:cNvPr>
@@ -2170,7 +2170,7 @@
           <p:cNvPr id="8" name="">
             <a:extLst xmlns:a="http://schemas.openxmlformats.org/drawingml/2006/main">
               <a:ext uri="{FF2B5EF4-FFF2-40B4-BE49-F238E27FC236}">
-                <a16:creationId xmlns:a16="http://schemas.microsoft.com/office/drawing/2014/main" id="{A371FDBC-A2CE-4B2B-9771-13AF41BEBC8A}"/>
+                <a16:creationId xmlns:a16="http://schemas.microsoft.com/office/drawing/2014/main" id="{8AEFD9A5-925D-40EA-81E8-4450F2C2D1F8}"/>
               </a:ext>
             </a:extLst>
           </p:cNvPr>
@@ -2227,7 +2227,7 @@
           <p:cNvPr id="9" name="">
             <a:extLst xmlns:a="http://schemas.openxmlformats.org/drawingml/2006/main">
               <a:ext uri="{FF2B5EF4-FFF2-40B4-BE49-F238E27FC236}">
-                <a16:creationId xmlns:a16="http://schemas.microsoft.com/office/drawing/2014/main" id="{C4AFF139-DD04-4F3F-AD08-F5507521319D}"/>
+                <a16:creationId xmlns:a16="http://schemas.microsoft.com/office/drawing/2014/main" id="{6151EABC-600C-49AA-842A-2E0E080CE001}"/>
               </a:ext>
             </a:extLst>
           </p:cNvPr>
@@ -2284,7 +2284,7 @@
           <p:cNvPr id="10" name="">
             <a:extLst xmlns:a="http://schemas.openxmlformats.org/drawingml/2006/main">
               <a:ext uri="{FF2B5EF4-FFF2-40B4-BE49-F238E27FC236}">
-                <a16:creationId xmlns:a16="http://schemas.microsoft.com/office/drawing/2014/main" id="{F9EF5AC0-ED21-43FA-B334-895300621EE2}"/>
+                <a16:creationId xmlns:a16="http://schemas.microsoft.com/office/drawing/2014/main" id="{DCCE7F86-12E1-4380-833F-25BE31BD42C7}"/>
               </a:ext>
             </a:extLst>
           </p:cNvPr>
@@ -2341,7 +2341,7 @@
           <p:cNvPr id="11" name="">
             <a:extLst xmlns:a="http://schemas.openxmlformats.org/drawingml/2006/main">
               <a:ext uri="{FF2B5EF4-FFF2-40B4-BE49-F238E27FC236}">
-                <a16:creationId xmlns:a16="http://schemas.microsoft.com/office/drawing/2014/main" id="{DE3FF474-28CB-42AF-AFA7-841E705044E2}"/>
+                <a16:creationId xmlns:a16="http://schemas.microsoft.com/office/drawing/2014/main" id="{B1E89A18-6F63-4DFB-BCB4-1D198AE09238}"/>
               </a:ext>
             </a:extLst>
           </p:cNvPr>
@@ -2396,7 +2396,7 @@
     </p:spTree>
     <p:extLst>
       <p:ext uri="{BB962C8B-B14F-4D97-AF65-F5344CB8AC3E}">
-        <p14:creationId xmlns:p14="http://schemas.microsoft.com/office/powerpoint/2010/main" val="1672781332"/>
+        <p14:creationId xmlns:p14="http://schemas.microsoft.com/office/powerpoint/2010/main" val="1611226454"/>
       </p:ext>
     </p:extLst>
   </p:cSld>
@@ -2427,7 +2427,7 @@
           <p:cNvPr id="14" name="">
             <a:extLst xmlns:a="http://schemas.openxmlformats.org/drawingml/2006/main">
               <a:ext uri="{FF2B5EF4-FFF2-40B4-BE49-F238E27FC236}">
-                <a16:creationId xmlns:a16="http://schemas.microsoft.com/office/drawing/2014/main" id="{23072C14-064C-4FA3-BA90-0CA1625C9268}"/>
+                <a16:creationId xmlns:a16="http://schemas.microsoft.com/office/drawing/2014/main" id="{20585CA7-B9B2-40DB-8F7C-7A91AB58099E}"/>
               </a:ext>
             </a:extLst>
           </p:cNvPr>
@@ -2459,7 +2459,7 @@
           <p:cNvPr id="2" name="">
             <a:extLst xmlns:a="http://schemas.openxmlformats.org/drawingml/2006/main">
               <a:ext uri="{FF2B5EF4-FFF2-40B4-BE49-F238E27FC236}">
-                <a16:creationId xmlns:a16="http://schemas.microsoft.com/office/drawing/2014/main" id="{86BBEE66-0431-4062-8910-8B339E5A9C18}"/>
+                <a16:creationId xmlns:a16="http://schemas.microsoft.com/office/drawing/2014/main" id="{AFD1FC62-AB7B-4AC8-9AD0-BF7426F7A584}"/>
               </a:ext>
             </a:extLst>
           </p:cNvPr>
@@ -2516,7 +2516,7 @@
           <p:cNvPr id="3" name="">
             <a:extLst xmlns:a="http://schemas.openxmlformats.org/drawingml/2006/main">
               <a:ext uri="{FF2B5EF4-FFF2-40B4-BE49-F238E27FC236}">
-                <a16:creationId xmlns:a16="http://schemas.microsoft.com/office/drawing/2014/main" id="{7A411F7C-C8A5-40F0-B8AE-BFCB5533AA6F}"/>
+                <a16:creationId xmlns:a16="http://schemas.microsoft.com/office/drawing/2014/main" id="{ABB12342-1E12-4B3F-AACF-B80AD38D0669}"/>
               </a:ext>
             </a:extLst>
           </p:cNvPr>
@@ -2548,7 +2548,7 @@
           <p:cNvPr id="4" name="">
             <a:extLst xmlns:a="http://schemas.openxmlformats.org/drawingml/2006/main">
               <a:ext uri="{FF2B5EF4-FFF2-40B4-BE49-F238E27FC236}">
-                <a16:creationId xmlns:a16="http://schemas.microsoft.com/office/drawing/2014/main" id="{7F850814-97BD-4149-97AF-A3D21636625F}"/>
+                <a16:creationId xmlns:a16="http://schemas.microsoft.com/office/drawing/2014/main" id="{8C4A9C68-8E84-48C4-AAD7-91335F49BF47}"/>
               </a:ext>
             </a:extLst>
           </p:cNvPr>
@@ -2605,7 +2605,7 @@
           <p:cNvPr id="5" name="">
             <a:extLst xmlns:a="http://schemas.openxmlformats.org/drawingml/2006/main">
               <a:ext uri="{FF2B5EF4-FFF2-40B4-BE49-F238E27FC236}">
-                <a16:creationId xmlns:a16="http://schemas.microsoft.com/office/drawing/2014/main" id="{53B72F19-2FD3-4249-BC10-A7325949487A}"/>
+                <a16:creationId xmlns:a16="http://schemas.microsoft.com/office/drawing/2014/main" id="{1B781239-3FD4-40EF-846B-434855354AC6}"/>
               </a:ext>
             </a:extLst>
           </p:cNvPr>
@@ -2662,7 +2662,7 @@
           <p:cNvPr id="6" name="">
             <a:extLst xmlns:a="http://schemas.openxmlformats.org/drawingml/2006/main">
               <a:ext uri="{FF2B5EF4-FFF2-40B4-BE49-F238E27FC236}">
-                <a16:creationId xmlns:a16="http://schemas.microsoft.com/office/drawing/2014/main" id="{9732FF43-C653-4C45-B1B4-7B0730304689}"/>
+                <a16:creationId xmlns:a16="http://schemas.microsoft.com/office/drawing/2014/main" id="{34E88CC0-7AF5-479D-8EFD-AB3003D524C8}"/>
               </a:ext>
             </a:extLst>
           </p:cNvPr>
@@ -2719,7 +2719,7 @@
           <p:cNvPr id="7" name="">
             <a:extLst xmlns:a="http://schemas.openxmlformats.org/drawingml/2006/main">
               <a:ext uri="{FF2B5EF4-FFF2-40B4-BE49-F238E27FC236}">
-                <a16:creationId xmlns:a16="http://schemas.microsoft.com/office/drawing/2014/main" id="{26AF7137-336C-4208-A8FA-3BD922F97B6B}"/>
+                <a16:creationId xmlns:a16="http://schemas.microsoft.com/office/drawing/2014/main" id="{8493D05A-9099-41C4-91BC-7532EAF58C79}"/>
               </a:ext>
             </a:extLst>
           </p:cNvPr>
@@ -2751,7 +2751,7 @@
           <p:cNvPr id="8" name="">
             <a:extLst xmlns:a="http://schemas.openxmlformats.org/drawingml/2006/main">
               <a:ext uri="{FF2B5EF4-FFF2-40B4-BE49-F238E27FC236}">
-                <a16:creationId xmlns:a16="http://schemas.microsoft.com/office/drawing/2014/main" id="{87F53B49-29FB-4D7F-A9BC-5618F295059B}"/>
+                <a16:creationId xmlns:a16="http://schemas.microsoft.com/office/drawing/2014/main" id="{43C90B4F-CC20-4BEC-B9B8-82A8BEFDBD6E}"/>
               </a:ext>
             </a:extLst>
           </p:cNvPr>
@@ -2808,7 +2808,7 @@
           <p:cNvPr id="9" name="">
             <a:extLst xmlns:a="http://schemas.openxmlformats.org/drawingml/2006/main">
               <a:ext uri="{FF2B5EF4-FFF2-40B4-BE49-F238E27FC236}">
-                <a16:creationId xmlns:a16="http://schemas.microsoft.com/office/drawing/2014/main" id="{4408ADA6-6513-4A43-8BCD-A0AC44AE7C0A}"/>
+                <a16:creationId xmlns:a16="http://schemas.microsoft.com/office/drawing/2014/main" id="{2A28CDF2-AB07-4913-B308-F7396DBB5168}"/>
               </a:ext>
             </a:extLst>
           </p:cNvPr>
@@ -2865,7 +2865,7 @@
           <p:cNvPr id="10" name="">
             <a:extLst xmlns:a="http://schemas.openxmlformats.org/drawingml/2006/main">
               <a:ext uri="{FF2B5EF4-FFF2-40B4-BE49-F238E27FC236}">
-                <a16:creationId xmlns:a16="http://schemas.microsoft.com/office/drawing/2014/main" id="{F2D8080C-F315-45B9-8594-F1BFD60D6632}"/>
+                <a16:creationId xmlns:a16="http://schemas.microsoft.com/office/drawing/2014/main" id="{72B43824-6525-4D22-BC01-95D41123F251}"/>
               </a:ext>
             </a:extLst>
           </p:cNvPr>
@@ -2922,7 +2922,7 @@
           <p:cNvPr id="11" name="">
             <a:extLst xmlns:a="http://schemas.openxmlformats.org/drawingml/2006/main">
               <a:ext uri="{FF2B5EF4-FFF2-40B4-BE49-F238E27FC236}">
-                <a16:creationId xmlns:a16="http://schemas.microsoft.com/office/drawing/2014/main" id="{43D94844-42D4-4096-9DB2-BB5123564AA5}"/>
+                <a16:creationId xmlns:a16="http://schemas.microsoft.com/office/drawing/2014/main" id="{B728A366-501E-4222-9E30-A5FEA754865B}"/>
               </a:ext>
             </a:extLst>
           </p:cNvPr>
@@ -2979,7 +2979,7 @@
           <p:cNvPr id="12" name="">
             <a:extLst xmlns:a="http://schemas.openxmlformats.org/drawingml/2006/main">
               <a:ext uri="{FF2B5EF4-FFF2-40B4-BE49-F238E27FC236}">
-                <a16:creationId xmlns:a16="http://schemas.microsoft.com/office/drawing/2014/main" id="{576DE810-6F8B-46DC-90B2-9E923B8419C7}"/>
+                <a16:creationId xmlns:a16="http://schemas.microsoft.com/office/drawing/2014/main" id="{440707AA-2D29-4133-8AA3-C4256BD36894}"/>
               </a:ext>
             </a:extLst>
           </p:cNvPr>
@@ -3036,7 +3036,7 @@
           <p:cNvPr id="13" name="">
             <a:extLst xmlns:a="http://schemas.openxmlformats.org/drawingml/2006/main">
               <a:ext uri="{FF2B5EF4-FFF2-40B4-BE49-F238E27FC236}">
-                <a16:creationId xmlns:a16="http://schemas.microsoft.com/office/drawing/2014/main" id="{13087691-0697-4452-A91A-EFD3EF487730}"/>
+                <a16:creationId xmlns:a16="http://schemas.microsoft.com/office/drawing/2014/main" id="{62807F8C-C608-4A04-A6B0-F24B9B3BC59C}"/>
               </a:ext>
             </a:extLst>
           </p:cNvPr>
@@ -3091,7 +3091,7 @@
     </p:spTree>
     <p:extLst>
       <p:ext uri="{BB962C8B-B14F-4D97-AF65-F5344CB8AC3E}">
-        <p14:creationId xmlns:p14="http://schemas.microsoft.com/office/powerpoint/2010/main" val="1848259537"/>
+        <p14:creationId xmlns:p14="http://schemas.microsoft.com/office/powerpoint/2010/main" val="1746629526"/>
       </p:ext>
     </p:extLst>
   </p:cSld>
@@ -3292,7 +3292,7 @@
           <p:cNvPr id="19" name="">
             <a:extLst xmlns:a="http://schemas.openxmlformats.org/drawingml/2006/main">
               <a:ext uri="{FF2B5EF4-FFF2-40B4-BE49-F238E27FC236}">
-                <a16:creationId xmlns:a16="http://schemas.microsoft.com/office/drawing/2014/main" id="{5640498C-2E1A-4B4E-9B7C-E8B608BDF4CC}"/>
+                <a16:creationId xmlns:a16="http://schemas.microsoft.com/office/drawing/2014/main" id="{60A22DD8-D2A8-4234-A08C-0D3AECC7F38E}"/>
               </a:ext>
             </a:extLst>
           </p:cNvPr>
@@ -3324,7 +3324,7 @@
           <p:cNvPr id="2" name="">
             <a:extLst xmlns:a="http://schemas.openxmlformats.org/drawingml/2006/main">
               <a:ext uri="{FF2B5EF4-FFF2-40B4-BE49-F238E27FC236}">
-                <a16:creationId xmlns:a16="http://schemas.microsoft.com/office/drawing/2014/main" id="{37892194-9907-4DF6-B102-AE48AA6ECF73}"/>
+                <a16:creationId xmlns:a16="http://schemas.microsoft.com/office/drawing/2014/main" id="{2C3BF996-E75E-433E-BD20-E030EAFF0D67}"/>
               </a:ext>
             </a:extLst>
           </p:cNvPr>
@@ -3381,7 +3381,7 @@
           <p:cNvPr id="3" name="">
             <a:extLst xmlns:a="http://schemas.openxmlformats.org/drawingml/2006/main">
               <a:ext uri="{FF2B5EF4-FFF2-40B4-BE49-F238E27FC236}">
-                <a16:creationId xmlns:a16="http://schemas.microsoft.com/office/drawing/2014/main" id="{8EF4C0CC-3DD4-42FD-A42F-99FFE9B67A7E}"/>
+                <a16:creationId xmlns:a16="http://schemas.microsoft.com/office/drawing/2014/main" id="{8D30DB67-2148-4552-A660-26E931ADB550}"/>
               </a:ext>
             </a:extLst>
           </p:cNvPr>
@@ -3413,7 +3413,7 @@
           <p:cNvPr id="4" name="">
             <a:extLst xmlns:a="http://schemas.openxmlformats.org/drawingml/2006/main">
               <a:ext uri="{FF2B5EF4-FFF2-40B4-BE49-F238E27FC236}">
-                <a16:creationId xmlns:a16="http://schemas.microsoft.com/office/drawing/2014/main" id="{676AD95D-C168-4918-A533-575A0FE06E3D}"/>
+                <a16:creationId xmlns:a16="http://schemas.microsoft.com/office/drawing/2014/main" id="{BC7B96CB-2F17-4797-A379-2F5C7F83A256}"/>
               </a:ext>
             </a:extLst>
           </p:cNvPr>
@@ -3470,7 +3470,7 @@
           <p:cNvPr id="5" name="">
             <a:extLst xmlns:a="http://schemas.openxmlformats.org/drawingml/2006/main">
               <a:ext uri="{FF2B5EF4-FFF2-40B4-BE49-F238E27FC236}">
-                <a16:creationId xmlns:a16="http://schemas.microsoft.com/office/drawing/2014/main" id="{70FAC781-B298-46FD-BE40-F9330829B6CB}"/>
+                <a16:creationId xmlns:a16="http://schemas.microsoft.com/office/drawing/2014/main" id="{C52BE580-5668-446D-8696-46EE029726D2}"/>
               </a:ext>
             </a:extLst>
           </p:cNvPr>
@@ -3527,7 +3527,7 @@
           <p:cNvPr id="6" name="">
             <a:extLst xmlns:a="http://schemas.openxmlformats.org/drawingml/2006/main">
               <a:ext uri="{FF2B5EF4-FFF2-40B4-BE49-F238E27FC236}">
-                <a16:creationId xmlns:a16="http://schemas.microsoft.com/office/drawing/2014/main" id="{039B40FA-9722-4A9E-A8E8-8757BB03460F}"/>
+                <a16:creationId xmlns:a16="http://schemas.microsoft.com/office/drawing/2014/main" id="{8EE1EC04-50A1-4240-891E-87347B5B5AD2}"/>
               </a:ext>
             </a:extLst>
           </p:cNvPr>
@@ -3584,7 +3584,7 @@
           <p:cNvPr id="7" name="">
             <a:extLst xmlns:a="http://schemas.openxmlformats.org/drawingml/2006/main">
               <a:ext uri="{FF2B5EF4-FFF2-40B4-BE49-F238E27FC236}">
-                <a16:creationId xmlns:a16="http://schemas.microsoft.com/office/drawing/2014/main" id="{40EAEF07-9B03-4688-ADE7-4D74F6564F90}"/>
+                <a16:creationId xmlns:a16="http://schemas.microsoft.com/office/drawing/2014/main" id="{9C491AE8-A461-4485-9F8B-EF222DE15C9D}"/>
               </a:ext>
             </a:extLst>
           </p:cNvPr>
@@ -3616,7 +3616,7 @@
           <p:cNvPr id="8" name="">
             <a:extLst xmlns:a="http://schemas.openxmlformats.org/drawingml/2006/main">
               <a:ext uri="{FF2B5EF4-FFF2-40B4-BE49-F238E27FC236}">
-                <a16:creationId xmlns:a16="http://schemas.microsoft.com/office/drawing/2014/main" id="{8C0B6ADC-776C-4E8E-84B6-0ECD3F07114D}"/>
+                <a16:creationId xmlns:a16="http://schemas.microsoft.com/office/drawing/2014/main" id="{8D292892-1AC2-412C-A4BB-22588D794F94}"/>
               </a:ext>
             </a:extLst>
           </p:cNvPr>
@@ -3673,7 +3673,7 @@
           <p:cNvPr id="9" name="">
             <a:extLst xmlns:a="http://schemas.openxmlformats.org/drawingml/2006/main">
               <a:ext uri="{FF2B5EF4-FFF2-40B4-BE49-F238E27FC236}">
-                <a16:creationId xmlns:a16="http://schemas.microsoft.com/office/drawing/2014/main" id="{097C68F8-6D07-4454-9488-9953507344B7}"/>
+                <a16:creationId xmlns:a16="http://schemas.microsoft.com/office/drawing/2014/main" id="{8DCBEE9A-CDFB-45FA-BC2C-39A058EAB390}"/>
               </a:ext>
             </a:extLst>
           </p:cNvPr>
@@ -3730,7 +3730,7 @@
           <p:cNvPr id="10" name="">
             <a:extLst xmlns:a="http://schemas.openxmlformats.org/drawingml/2006/main">
               <a:ext uri="{FF2B5EF4-FFF2-40B4-BE49-F238E27FC236}">
-                <a16:creationId xmlns:a16="http://schemas.microsoft.com/office/drawing/2014/main" id="{3F77EECD-3027-488C-B752-7D39B2732065}"/>
+                <a16:creationId xmlns:a16="http://schemas.microsoft.com/office/drawing/2014/main" id="{ED8612AA-5EDF-4997-AB7F-0ECDA0367FAA}"/>
               </a:ext>
             </a:extLst>
           </p:cNvPr>
@@ -3787,7 +3787,7 @@
           <p:cNvPr id="11" name="">
             <a:extLst xmlns:a="http://schemas.openxmlformats.org/drawingml/2006/main">
               <a:ext uri="{FF2B5EF4-FFF2-40B4-BE49-F238E27FC236}">
-                <a16:creationId xmlns:a16="http://schemas.microsoft.com/office/drawing/2014/main" id="{EB43506A-A1A3-4E35-9910-A4135C4734B1}"/>
+                <a16:creationId xmlns:a16="http://schemas.microsoft.com/office/drawing/2014/main" id="{C6372482-F60B-4E8E-AEF2-E83257C13D9E}"/>
               </a:ext>
             </a:extLst>
           </p:cNvPr>
@@ -3821,7 +3821,7 @@
           <p:cNvPr id="12" name="">
             <a:extLst xmlns:a="http://schemas.openxmlformats.org/drawingml/2006/main">
               <a:ext uri="{FF2B5EF4-FFF2-40B4-BE49-F238E27FC236}">
-                <a16:creationId xmlns:a16="http://schemas.microsoft.com/office/drawing/2014/main" id="{5E1E120E-4DA5-4A09-AEE1-6D4740631088}"/>
+                <a16:creationId xmlns:a16="http://schemas.microsoft.com/office/drawing/2014/main" id="{345704A5-C6DB-4C99-A519-CF57258541CB}"/>
               </a:ext>
             </a:extLst>
           </p:cNvPr>
@@ -3878,7 +3878,7 @@
           <p:cNvPr id="13" name="">
             <a:extLst xmlns:a="http://schemas.openxmlformats.org/drawingml/2006/main">
               <a:ext uri="{FF2B5EF4-FFF2-40B4-BE49-F238E27FC236}">
-                <a16:creationId xmlns:a16="http://schemas.microsoft.com/office/drawing/2014/main" id="{34999EF2-8D43-427F-B58E-E1D92AF39064}"/>
+                <a16:creationId xmlns:a16="http://schemas.microsoft.com/office/drawing/2014/main" id="{74419058-4F76-4E94-BA22-7AC5E94CA363}"/>
               </a:ext>
             </a:extLst>
           </p:cNvPr>
@@ -3935,7 +3935,7 @@
           <p:cNvPr id="14" name="">
             <a:extLst xmlns:a="http://schemas.openxmlformats.org/drawingml/2006/main">
               <a:ext uri="{FF2B5EF4-FFF2-40B4-BE49-F238E27FC236}">
-                <a16:creationId xmlns:a16="http://schemas.microsoft.com/office/drawing/2014/main" id="{AD4FEBAB-2EE8-43D9-BC8B-57236825E350}"/>
+                <a16:creationId xmlns:a16="http://schemas.microsoft.com/office/drawing/2014/main" id="{6E6171A6-89D2-4EFA-9864-448D5B04C74C}"/>
               </a:ext>
             </a:extLst>
           </p:cNvPr>
@@ -3992,7 +3992,7 @@
           <p:cNvPr id="15" name="">
             <a:extLst xmlns:a="http://schemas.openxmlformats.org/drawingml/2006/main">
               <a:ext uri="{FF2B5EF4-FFF2-40B4-BE49-F238E27FC236}">
-                <a16:creationId xmlns:a16="http://schemas.microsoft.com/office/drawing/2014/main" id="{111DFFBB-D5C0-4EBF-BBB4-6D724AE51AA5}"/>
+                <a16:creationId xmlns:a16="http://schemas.microsoft.com/office/drawing/2014/main" id="{8E120400-E956-43FC-9414-B1537BEAFCB9}"/>
               </a:ext>
             </a:extLst>
           </p:cNvPr>
@@ -4026,7 +4026,7 @@
           <p:cNvPr id="16" name="">
             <a:extLst xmlns:a="http://schemas.openxmlformats.org/drawingml/2006/main">
               <a:ext uri="{FF2B5EF4-FFF2-40B4-BE49-F238E27FC236}">
-                <a16:creationId xmlns:a16="http://schemas.microsoft.com/office/drawing/2014/main" id="{E6A9FFAD-31DB-40E4-AF80-C4BE7D11A0FD}"/>
+                <a16:creationId xmlns:a16="http://schemas.microsoft.com/office/drawing/2014/main" id="{C9D40930-D366-43E5-BC15-683FCA24D021}"/>
               </a:ext>
             </a:extLst>
           </p:cNvPr>
@@ -4083,7 +4083,7 @@
           <p:cNvPr id="17" name="">
             <a:extLst xmlns:a="http://schemas.openxmlformats.org/drawingml/2006/main">
               <a:ext uri="{FF2B5EF4-FFF2-40B4-BE49-F238E27FC236}">
-                <a16:creationId xmlns:a16="http://schemas.microsoft.com/office/drawing/2014/main" id="{F0F2FD6B-A589-46CC-A640-2845D468E8E7}"/>
+                <a16:creationId xmlns:a16="http://schemas.microsoft.com/office/drawing/2014/main" id="{91081F20-C316-4795-B7A0-D7B5A67709A5}"/>
               </a:ext>
             </a:extLst>
           </p:cNvPr>
@@ -4140,7 +4140,7 @@
           <p:cNvPr id="18" name="">
             <a:extLst xmlns:a="http://schemas.openxmlformats.org/drawingml/2006/main">
               <a:ext uri="{FF2B5EF4-FFF2-40B4-BE49-F238E27FC236}">
-                <a16:creationId xmlns:a16="http://schemas.microsoft.com/office/drawing/2014/main" id="{5234093D-F097-4381-9921-604834E5609F}"/>
+                <a16:creationId xmlns:a16="http://schemas.microsoft.com/office/drawing/2014/main" id="{A6DF7471-56F6-497C-98F9-CF7B62219979}"/>
               </a:ext>
             </a:extLst>
           </p:cNvPr>
@@ -4195,7 +4195,7 @@
     </p:spTree>
     <p:extLst>
       <p:ext uri="{BB962C8B-B14F-4D97-AF65-F5344CB8AC3E}">
-        <p14:creationId xmlns:p14="http://schemas.microsoft.com/office/powerpoint/2010/main" val="1981571870"/>
+        <p14:creationId xmlns:p14="http://schemas.microsoft.com/office/powerpoint/2010/main" val="1302144648"/>
       </p:ext>
     </p:extLst>
   </p:cSld>
@@ -4350,7 +4350,7 @@
           <p:cNvPr id="23" name="">
             <a:extLst xmlns:a="http://schemas.openxmlformats.org/drawingml/2006/main">
               <a:ext uri="{FF2B5EF4-FFF2-40B4-BE49-F238E27FC236}">
-                <a16:creationId xmlns:a16="http://schemas.microsoft.com/office/drawing/2014/main" id="{34BB0E40-B5F3-4666-BA66-828DDDE0AC55}"/>
+                <a16:creationId xmlns:a16="http://schemas.microsoft.com/office/drawing/2014/main" id="{4655B536-2DC7-44EB-A135-B5D1284D5AAE}"/>
               </a:ext>
             </a:extLst>
           </p:cNvPr>
@@ -4382,7 +4382,7 @@
           <p:cNvPr id="2" name="">
             <a:extLst xmlns:a="http://schemas.openxmlformats.org/drawingml/2006/main">
               <a:ext uri="{FF2B5EF4-FFF2-40B4-BE49-F238E27FC236}">
-                <a16:creationId xmlns:a16="http://schemas.microsoft.com/office/drawing/2014/main" id="{50F81168-B53D-465D-A3A8-2E8DFA9931E3}"/>
+                <a16:creationId xmlns:a16="http://schemas.microsoft.com/office/drawing/2014/main" id="{E0D2A6E0-82BB-4428-BCBA-29009C2E0923}"/>
               </a:ext>
             </a:extLst>
           </p:cNvPr>
@@ -4439,7 +4439,7 @@
           <p:cNvPr id="3" name="">
             <a:extLst xmlns:a="http://schemas.openxmlformats.org/drawingml/2006/main">
               <a:ext uri="{FF2B5EF4-FFF2-40B4-BE49-F238E27FC236}">
-                <a16:creationId xmlns:a16="http://schemas.microsoft.com/office/drawing/2014/main" id="{7E3D467A-AF28-49E9-8E57-5891C5C2D81C}"/>
+                <a16:creationId xmlns:a16="http://schemas.microsoft.com/office/drawing/2014/main" id="{8E8D3E2B-2BCD-4908-88A2-040D841057E3}"/>
               </a:ext>
             </a:extLst>
           </p:cNvPr>
@@ -4471,7 +4471,7 @@
           <p:cNvPr id="4" name="">
             <a:extLst xmlns:a="http://schemas.openxmlformats.org/drawingml/2006/main">
               <a:ext uri="{FF2B5EF4-FFF2-40B4-BE49-F238E27FC236}">
-                <a16:creationId xmlns:a16="http://schemas.microsoft.com/office/drawing/2014/main" id="{E0CCDEBC-864F-4F79-9064-A815EC651C56}"/>
+                <a16:creationId xmlns:a16="http://schemas.microsoft.com/office/drawing/2014/main" id="{3133A0AC-B588-4A7A-A8D6-8D9F8F46DA81}"/>
               </a:ext>
             </a:extLst>
           </p:cNvPr>
@@ -4528,7 +4528,7 @@
           <p:cNvPr id="5" name="">
             <a:extLst xmlns:a="http://schemas.openxmlformats.org/drawingml/2006/main">
               <a:ext uri="{FF2B5EF4-FFF2-40B4-BE49-F238E27FC236}">
-                <a16:creationId xmlns:a16="http://schemas.microsoft.com/office/drawing/2014/main" id="{83CC59E7-96E1-43E7-9C50-C6A3C1ECC6FF}"/>
+                <a16:creationId xmlns:a16="http://schemas.microsoft.com/office/drawing/2014/main" id="{2F2E07E1-0CE8-4AE0-9582-04827795059F}"/>
               </a:ext>
             </a:extLst>
           </p:cNvPr>
@@ -4585,7 +4585,7 @@
           <p:cNvPr id="6" name="">
             <a:extLst xmlns:a="http://schemas.openxmlformats.org/drawingml/2006/main">
               <a:ext uri="{FF2B5EF4-FFF2-40B4-BE49-F238E27FC236}">
-                <a16:creationId xmlns:a16="http://schemas.microsoft.com/office/drawing/2014/main" id="{305E85C3-4CA6-4B71-B030-53844BB8F8CC}"/>
+                <a16:creationId xmlns:a16="http://schemas.microsoft.com/office/drawing/2014/main" id="{1DB75E1D-47F9-40CF-9A9B-4C7A93D1C3E7}"/>
               </a:ext>
             </a:extLst>
           </p:cNvPr>
@@ -4642,7 +4642,7 @@
           <p:cNvPr id="7" name="">
             <a:extLst xmlns:a="http://schemas.openxmlformats.org/drawingml/2006/main">
               <a:ext uri="{FF2B5EF4-FFF2-40B4-BE49-F238E27FC236}">
-                <a16:creationId xmlns:a16="http://schemas.microsoft.com/office/drawing/2014/main" id="{E409E9B2-4803-4FB4-A201-B5D58D99FDE9}"/>
+                <a16:creationId xmlns:a16="http://schemas.microsoft.com/office/drawing/2014/main" id="{BA3D127F-4DF4-4E7F-9E7B-94314931830C}"/>
               </a:ext>
             </a:extLst>
           </p:cNvPr>
@@ -4674,7 +4674,7 @@
           <p:cNvPr id="8" name="">
             <a:extLst xmlns:a="http://schemas.openxmlformats.org/drawingml/2006/main">
               <a:ext uri="{FF2B5EF4-FFF2-40B4-BE49-F238E27FC236}">
-                <a16:creationId xmlns:a16="http://schemas.microsoft.com/office/drawing/2014/main" id="{4D9CBAE7-E936-4611-BC9D-7C60C791B619}"/>
+                <a16:creationId xmlns:a16="http://schemas.microsoft.com/office/drawing/2014/main" id="{24FF3885-FEF6-4B4D-9AD5-0D2ADD644521}"/>
               </a:ext>
             </a:extLst>
           </p:cNvPr>
@@ -4731,7 +4731,7 @@
           <p:cNvPr id="9" name="">
             <a:extLst xmlns:a="http://schemas.openxmlformats.org/drawingml/2006/main">
               <a:ext uri="{FF2B5EF4-FFF2-40B4-BE49-F238E27FC236}">
-                <a16:creationId xmlns:a16="http://schemas.microsoft.com/office/drawing/2014/main" id="{3828427B-6AF6-432D-812B-9A411F0AC094}"/>
+                <a16:creationId xmlns:a16="http://schemas.microsoft.com/office/drawing/2014/main" id="{98AB7ABD-0548-4662-A88C-D7954A1D2FA0}"/>
               </a:ext>
             </a:extLst>
           </p:cNvPr>
@@ -4788,7 +4788,7 @@
           <p:cNvPr id="10" name="">
             <a:extLst xmlns:a="http://schemas.openxmlformats.org/drawingml/2006/main">
               <a:ext uri="{FF2B5EF4-FFF2-40B4-BE49-F238E27FC236}">
-                <a16:creationId xmlns:a16="http://schemas.microsoft.com/office/drawing/2014/main" id="{E8EA23AD-A056-4966-A5A0-7F6E201B29F8}"/>
+                <a16:creationId xmlns:a16="http://schemas.microsoft.com/office/drawing/2014/main" id="{737DD844-9915-4C6C-853A-7783BB27954D}"/>
               </a:ext>
             </a:extLst>
           </p:cNvPr>
@@ -4822,7 +4822,7 @@
           <p:cNvPr id="11" name="">
             <a:extLst xmlns:a="http://schemas.openxmlformats.org/drawingml/2006/main">
               <a:ext uri="{FF2B5EF4-FFF2-40B4-BE49-F238E27FC236}">
-                <a16:creationId xmlns:a16="http://schemas.microsoft.com/office/drawing/2014/main" id="{433F83F0-014A-4442-88CA-8A95924D3FD2}"/>
+                <a16:creationId xmlns:a16="http://schemas.microsoft.com/office/drawing/2014/main" id="{AC278717-0B4A-47C7-88CB-8CD6033C58E4}"/>
               </a:ext>
             </a:extLst>
           </p:cNvPr>
@@ -4854,7 +4854,7 @@
           <p:cNvPr id="12" name="">
             <a:extLst xmlns:a="http://schemas.openxmlformats.org/drawingml/2006/main">
               <a:ext uri="{FF2B5EF4-FFF2-40B4-BE49-F238E27FC236}">
-                <a16:creationId xmlns:a16="http://schemas.microsoft.com/office/drawing/2014/main" id="{195B871B-8FB2-4824-AC55-330F11E0F8B8}"/>
+                <a16:creationId xmlns:a16="http://schemas.microsoft.com/office/drawing/2014/main" id="{10ECF24F-DB9E-45EC-B4D9-8F6355ABC81C}"/>
               </a:ext>
             </a:extLst>
           </p:cNvPr>
@@ -4911,7 +4911,7 @@
           <p:cNvPr id="13" name="">
             <a:extLst xmlns:a="http://schemas.openxmlformats.org/drawingml/2006/main">
               <a:ext uri="{FF2B5EF4-FFF2-40B4-BE49-F238E27FC236}">
-                <a16:creationId xmlns:a16="http://schemas.microsoft.com/office/drawing/2014/main" id="{5A9C7E36-A09C-45B2-9EF2-A69930029330}"/>
+                <a16:creationId xmlns:a16="http://schemas.microsoft.com/office/drawing/2014/main" id="{FBC0ADA0-5479-45C8-95EF-26006FD13B53}"/>
               </a:ext>
             </a:extLst>
           </p:cNvPr>
@@ -4968,7 +4968,7 @@
           <p:cNvPr id="14" name="">
             <a:extLst xmlns:a="http://schemas.openxmlformats.org/drawingml/2006/main">
               <a:ext uri="{FF2B5EF4-FFF2-40B4-BE49-F238E27FC236}">
-                <a16:creationId xmlns:a16="http://schemas.microsoft.com/office/drawing/2014/main" id="{9958327C-6183-4D9C-A654-4F923A93FF36}"/>
+                <a16:creationId xmlns:a16="http://schemas.microsoft.com/office/drawing/2014/main" id="{558170F9-2BD6-4AC5-8FB3-F4209A19BD38}"/>
               </a:ext>
             </a:extLst>
           </p:cNvPr>
@@ -5002,7 +5002,7 @@
           <p:cNvPr id="15" name="">
             <a:extLst xmlns:a="http://schemas.openxmlformats.org/drawingml/2006/main">
               <a:ext uri="{FF2B5EF4-FFF2-40B4-BE49-F238E27FC236}">
-                <a16:creationId xmlns:a16="http://schemas.microsoft.com/office/drawing/2014/main" id="{E38D05B2-57AA-44F4-8568-E014B3C41896}"/>
+                <a16:creationId xmlns:a16="http://schemas.microsoft.com/office/drawing/2014/main" id="{E49EE3DC-297C-4B78-9DF0-D4CE8CC3FD60}"/>
               </a:ext>
             </a:extLst>
           </p:cNvPr>
@@ -5034,7 +5034,7 @@
           <p:cNvPr id="16" name="">
             <a:extLst xmlns:a="http://schemas.openxmlformats.org/drawingml/2006/main">
               <a:ext uri="{FF2B5EF4-FFF2-40B4-BE49-F238E27FC236}">
-                <a16:creationId xmlns:a16="http://schemas.microsoft.com/office/drawing/2014/main" id="{FAC7936E-D0F0-4A45-B399-7D1EA6A8CD20}"/>
+                <a16:creationId xmlns:a16="http://schemas.microsoft.com/office/drawing/2014/main" id="{166D3E81-F229-4DFC-A59E-202E50126D81}"/>
               </a:ext>
             </a:extLst>
           </p:cNvPr>
@@ -5091,7 +5091,7 @@
           <p:cNvPr id="17" name="">
             <a:extLst xmlns:a="http://schemas.openxmlformats.org/drawingml/2006/main">
               <a:ext uri="{FF2B5EF4-FFF2-40B4-BE49-F238E27FC236}">
-                <a16:creationId xmlns:a16="http://schemas.microsoft.com/office/drawing/2014/main" id="{FBB83815-CC65-456A-BAB7-D96521B8D2C7}"/>
+                <a16:creationId xmlns:a16="http://schemas.microsoft.com/office/drawing/2014/main" id="{40DD0BFA-2981-4162-853E-9E50B76889BF}"/>
               </a:ext>
             </a:extLst>
           </p:cNvPr>
@@ -5148,7 +5148,7 @@
           <p:cNvPr id="18" name="">
             <a:extLst xmlns:a="http://schemas.openxmlformats.org/drawingml/2006/main">
               <a:ext uri="{FF2B5EF4-FFF2-40B4-BE49-F238E27FC236}">
-                <a16:creationId xmlns:a16="http://schemas.microsoft.com/office/drawing/2014/main" id="{3C3CA91A-4E07-4D1E-AB90-D185332722B9}"/>
+                <a16:creationId xmlns:a16="http://schemas.microsoft.com/office/drawing/2014/main" id="{AED43D6C-18CA-44EB-8CA1-A8C3D2EE0FD3}"/>
               </a:ext>
             </a:extLst>
           </p:cNvPr>
@@ -5182,7 +5182,7 @@
           <p:cNvPr id="19" name="">
             <a:extLst xmlns:a="http://schemas.openxmlformats.org/drawingml/2006/main">
               <a:ext uri="{FF2B5EF4-FFF2-40B4-BE49-F238E27FC236}">
-                <a16:creationId xmlns:a16="http://schemas.microsoft.com/office/drawing/2014/main" id="{087EF55A-233E-4071-BEA2-4A5AD8E31E44}"/>
+                <a16:creationId xmlns:a16="http://schemas.microsoft.com/office/drawing/2014/main" id="{5B86EFC6-C943-442C-A492-C33EE2BBC74B}"/>
               </a:ext>
             </a:extLst>
           </p:cNvPr>
@@ -5214,7 +5214,7 @@
           <p:cNvPr id="20" name="">
             <a:extLst xmlns:a="http://schemas.openxmlformats.org/drawingml/2006/main">
               <a:ext uri="{FF2B5EF4-FFF2-40B4-BE49-F238E27FC236}">
-                <a16:creationId xmlns:a16="http://schemas.microsoft.com/office/drawing/2014/main" id="{97B38D15-30DE-480E-A0EF-1A7562014E0F}"/>
+                <a16:creationId xmlns:a16="http://schemas.microsoft.com/office/drawing/2014/main" id="{B09BE3F0-222E-446E-8709-31B4A0361FDA}"/>
               </a:ext>
             </a:extLst>
           </p:cNvPr>
@@ -5271,7 +5271,7 @@
           <p:cNvPr id="21" name="">
             <a:extLst xmlns:a="http://schemas.openxmlformats.org/drawingml/2006/main">
               <a:ext uri="{FF2B5EF4-FFF2-40B4-BE49-F238E27FC236}">
-                <a16:creationId xmlns:a16="http://schemas.microsoft.com/office/drawing/2014/main" id="{D44DF05F-2A42-4A46-8E44-42C9E733298D}"/>
+                <a16:creationId xmlns:a16="http://schemas.microsoft.com/office/drawing/2014/main" id="{B4F66EBD-6035-4B6E-B6E5-0BB0EF99D335}"/>
               </a:ext>
             </a:extLst>
           </p:cNvPr>
@@ -5328,7 +5328,7 @@
           <p:cNvPr id="22" name="">
             <a:extLst xmlns:a="http://schemas.openxmlformats.org/drawingml/2006/main">
               <a:ext uri="{FF2B5EF4-FFF2-40B4-BE49-F238E27FC236}">
-                <a16:creationId xmlns:a16="http://schemas.microsoft.com/office/drawing/2014/main" id="{923811D4-87DB-423E-B465-038C12A21B1E}"/>
+                <a16:creationId xmlns:a16="http://schemas.microsoft.com/office/drawing/2014/main" id="{179718F8-E22A-473F-903C-1BA4048F85FE}"/>
               </a:ext>
             </a:extLst>
           </p:cNvPr>
@@ -5383,7 +5383,7 @@
     </p:spTree>
     <p:extLst>
       <p:ext uri="{BB962C8B-B14F-4D97-AF65-F5344CB8AC3E}">
-        <p14:creationId xmlns:p14="http://schemas.microsoft.com/office/powerpoint/2010/main" val="1103037874"/>
+        <p14:creationId xmlns:p14="http://schemas.microsoft.com/office/powerpoint/2010/main" val="330203756"/>
       </p:ext>
     </p:extLst>
   </p:cSld>
@@ -5584,7 +5584,7 @@
           <p:cNvPr id="23" name="">
             <a:extLst xmlns:a="http://schemas.openxmlformats.org/drawingml/2006/main">
               <a:ext uri="{FF2B5EF4-FFF2-40B4-BE49-F238E27FC236}">
-                <a16:creationId xmlns:a16="http://schemas.microsoft.com/office/drawing/2014/main" id="{4A496728-AA61-45B9-A282-6D02A69BA875}"/>
+                <a16:creationId xmlns:a16="http://schemas.microsoft.com/office/drawing/2014/main" id="{1A04E323-2558-47E5-A4EA-667F5BBA2C5B}"/>
               </a:ext>
             </a:extLst>
           </p:cNvPr>
@@ -5616,7 +5616,7 @@
           <p:cNvPr id="2" name="">
             <a:extLst xmlns:a="http://schemas.openxmlformats.org/drawingml/2006/main">
               <a:ext uri="{FF2B5EF4-FFF2-40B4-BE49-F238E27FC236}">
-                <a16:creationId xmlns:a16="http://schemas.microsoft.com/office/drawing/2014/main" id="{5FE91108-E696-4633-BA27-8029430FC448}"/>
+                <a16:creationId xmlns:a16="http://schemas.microsoft.com/office/drawing/2014/main" id="{4B455678-0F72-47DA-BF08-3E541A9B1D19}"/>
               </a:ext>
             </a:extLst>
           </p:cNvPr>
@@ -5673,7 +5673,7 @@
           <p:cNvPr id="3" name="">
             <a:extLst xmlns:a="http://schemas.openxmlformats.org/drawingml/2006/main">
               <a:ext uri="{FF2B5EF4-FFF2-40B4-BE49-F238E27FC236}">
-                <a16:creationId xmlns:a16="http://schemas.microsoft.com/office/drawing/2014/main" id="{8408710C-A864-49EC-BD64-E6EE20D74577}"/>
+                <a16:creationId xmlns:a16="http://schemas.microsoft.com/office/drawing/2014/main" id="{8A640332-6C87-41C6-9B7E-5A5C1285BE8E}"/>
               </a:ext>
             </a:extLst>
           </p:cNvPr>
@@ -5705,7 +5705,7 @@
           <p:cNvPr id="4" name="">
             <a:extLst xmlns:a="http://schemas.openxmlformats.org/drawingml/2006/main">
               <a:ext uri="{FF2B5EF4-FFF2-40B4-BE49-F238E27FC236}">
-                <a16:creationId xmlns:a16="http://schemas.microsoft.com/office/drawing/2014/main" id="{72E28EF7-E703-4439-8AEB-D1B1C7BB23E8}"/>
+                <a16:creationId xmlns:a16="http://schemas.microsoft.com/office/drawing/2014/main" id="{5C503AD8-83EC-4A9A-A836-5A2BB5C4CFEA}"/>
               </a:ext>
             </a:extLst>
           </p:cNvPr>
@@ -5762,7 +5762,7 @@
           <p:cNvPr id="5" name="">
             <a:extLst xmlns:a="http://schemas.openxmlformats.org/drawingml/2006/main">
               <a:ext uri="{FF2B5EF4-FFF2-40B4-BE49-F238E27FC236}">
-                <a16:creationId xmlns:a16="http://schemas.microsoft.com/office/drawing/2014/main" id="{1D90FC1E-C1F5-47EA-9B76-0216CBF63076}"/>
+                <a16:creationId xmlns:a16="http://schemas.microsoft.com/office/drawing/2014/main" id="{2C681489-AFB3-46DC-A9FD-3E89D4A2AA63}"/>
               </a:ext>
             </a:extLst>
           </p:cNvPr>
@@ -5819,7 +5819,7 @@
           <p:cNvPr id="6" name="">
             <a:extLst xmlns:a="http://schemas.openxmlformats.org/drawingml/2006/main">
               <a:ext uri="{FF2B5EF4-FFF2-40B4-BE49-F238E27FC236}">
-                <a16:creationId xmlns:a16="http://schemas.microsoft.com/office/drawing/2014/main" id="{EA887924-923C-43D0-918E-563A6F80AE75}"/>
+                <a16:creationId xmlns:a16="http://schemas.microsoft.com/office/drawing/2014/main" id="{551DAAB0-7229-4563-8063-D8BFFFD15BE8}"/>
               </a:ext>
             </a:extLst>
           </p:cNvPr>
@@ -5876,7 +5876,7 @@
           <p:cNvPr id="7" name="">
             <a:extLst xmlns:a="http://schemas.openxmlformats.org/drawingml/2006/main">
               <a:ext uri="{FF2B5EF4-FFF2-40B4-BE49-F238E27FC236}">
-                <a16:creationId xmlns:a16="http://schemas.microsoft.com/office/drawing/2014/main" id="{54722B6E-379D-4DD2-A547-1D6178E1A3A5}"/>
+                <a16:creationId xmlns:a16="http://schemas.microsoft.com/office/drawing/2014/main" id="{FAB1DE7B-ACDE-4DBC-9D8A-028E35139135}"/>
               </a:ext>
             </a:extLst>
           </p:cNvPr>
@@ -5908,7 +5908,7 @@
           <p:cNvPr id="8" name="">
             <a:extLst xmlns:a="http://schemas.openxmlformats.org/drawingml/2006/main">
               <a:ext uri="{FF2B5EF4-FFF2-40B4-BE49-F238E27FC236}">
-                <a16:creationId xmlns:a16="http://schemas.microsoft.com/office/drawing/2014/main" id="{F39467C3-EC6D-4A15-9D5C-FCFB6933AE50}"/>
+                <a16:creationId xmlns:a16="http://schemas.microsoft.com/office/drawing/2014/main" id="{68E280B2-06AD-44B7-9844-F0366A988771}"/>
               </a:ext>
             </a:extLst>
           </p:cNvPr>
@@ -5965,7 +5965,7 @@
           <p:cNvPr id="9" name="">
             <a:extLst xmlns:a="http://schemas.openxmlformats.org/drawingml/2006/main">
               <a:ext uri="{FF2B5EF4-FFF2-40B4-BE49-F238E27FC236}">
-                <a16:creationId xmlns:a16="http://schemas.microsoft.com/office/drawing/2014/main" id="{9D98A932-D21A-4786-BC91-8A981A7EB3F6}"/>
+                <a16:creationId xmlns:a16="http://schemas.microsoft.com/office/drawing/2014/main" id="{A4169B7F-76ED-46BC-BF0C-EF0CEC488C56}"/>
               </a:ext>
             </a:extLst>
           </p:cNvPr>
@@ -6022,7 +6022,7 @@
           <p:cNvPr id="10" name="">
             <a:extLst xmlns:a="http://schemas.openxmlformats.org/drawingml/2006/main">
               <a:ext uri="{FF2B5EF4-FFF2-40B4-BE49-F238E27FC236}">
-                <a16:creationId xmlns:a16="http://schemas.microsoft.com/office/drawing/2014/main" id="{EDC1107F-4FF6-48EB-8817-F40216165FDA}"/>
+                <a16:creationId xmlns:a16="http://schemas.microsoft.com/office/drawing/2014/main" id="{95945035-F374-4AFB-A079-0A7ACAEA601C}"/>
               </a:ext>
             </a:extLst>
           </p:cNvPr>
@@ -6056,7 +6056,7 @@
           <p:cNvPr id="11" name="">
             <a:extLst xmlns:a="http://schemas.openxmlformats.org/drawingml/2006/main">
               <a:ext uri="{FF2B5EF4-FFF2-40B4-BE49-F238E27FC236}">
-                <a16:creationId xmlns:a16="http://schemas.microsoft.com/office/drawing/2014/main" id="{75B09149-B19D-4382-A3F4-C5F3FB910D33}"/>
+                <a16:creationId xmlns:a16="http://schemas.microsoft.com/office/drawing/2014/main" id="{B5886DCB-7B00-4654-BEAB-3232C1DDA603}"/>
               </a:ext>
             </a:extLst>
           </p:cNvPr>
@@ -6088,7 +6088,7 @@
           <p:cNvPr id="12" name="">
             <a:extLst xmlns:a="http://schemas.openxmlformats.org/drawingml/2006/main">
               <a:ext uri="{FF2B5EF4-FFF2-40B4-BE49-F238E27FC236}">
-                <a16:creationId xmlns:a16="http://schemas.microsoft.com/office/drawing/2014/main" id="{1B0E412A-2F83-4B55-85FD-E97CC2F5561C}"/>
+                <a16:creationId xmlns:a16="http://schemas.microsoft.com/office/drawing/2014/main" id="{059459F7-1A10-4D17-896F-BE8CE84425CE}"/>
               </a:ext>
             </a:extLst>
           </p:cNvPr>
@@ -6145,7 +6145,7 @@
           <p:cNvPr id="13" name="">
             <a:extLst xmlns:a="http://schemas.openxmlformats.org/drawingml/2006/main">
               <a:ext uri="{FF2B5EF4-FFF2-40B4-BE49-F238E27FC236}">
-                <a16:creationId xmlns:a16="http://schemas.microsoft.com/office/drawing/2014/main" id="{600297E0-B3DE-42D2-BDE2-70C444963790}"/>
+                <a16:creationId xmlns:a16="http://schemas.microsoft.com/office/drawing/2014/main" id="{F9D07BC8-5058-4573-A591-5019C2F9601B}"/>
               </a:ext>
             </a:extLst>
           </p:cNvPr>
@@ -6202,7 +6202,7 @@
           <p:cNvPr id="14" name="">
             <a:extLst xmlns:a="http://schemas.openxmlformats.org/drawingml/2006/main">
               <a:ext uri="{FF2B5EF4-FFF2-40B4-BE49-F238E27FC236}">
-                <a16:creationId xmlns:a16="http://schemas.microsoft.com/office/drawing/2014/main" id="{2FCD48A2-46C4-40B2-9A2F-7BFA137D8A64}"/>
+                <a16:creationId xmlns:a16="http://schemas.microsoft.com/office/drawing/2014/main" id="{3B35C065-62F7-4D1A-8CA1-3D928735EFA4}"/>
               </a:ext>
             </a:extLst>
           </p:cNvPr>
@@ -6236,7 +6236,7 @@
           <p:cNvPr id="15" name="">
             <a:extLst xmlns:a="http://schemas.openxmlformats.org/drawingml/2006/main">
               <a:ext uri="{FF2B5EF4-FFF2-40B4-BE49-F238E27FC236}">
-                <a16:creationId xmlns:a16="http://schemas.microsoft.com/office/drawing/2014/main" id="{68D34445-06AB-42F7-A9CB-EBFAF2501540}"/>
+                <a16:creationId xmlns:a16="http://schemas.microsoft.com/office/drawing/2014/main" id="{67FB19C7-E146-43C3-A837-9600765FBD10}"/>
               </a:ext>
             </a:extLst>
           </p:cNvPr>
@@ -6268,7 +6268,7 @@
           <p:cNvPr id="16" name="">
             <a:extLst xmlns:a="http://schemas.openxmlformats.org/drawingml/2006/main">
               <a:ext uri="{FF2B5EF4-FFF2-40B4-BE49-F238E27FC236}">
-                <a16:creationId xmlns:a16="http://schemas.microsoft.com/office/drawing/2014/main" id="{96D9D14D-0D7C-49BE-B272-0DFB423F2B8E}"/>
+                <a16:creationId xmlns:a16="http://schemas.microsoft.com/office/drawing/2014/main" id="{58BAC248-0832-4395-9087-5F422829A161}"/>
               </a:ext>
             </a:extLst>
           </p:cNvPr>
@@ -6325,7 +6325,7 @@
           <p:cNvPr id="17" name="">
             <a:extLst xmlns:a="http://schemas.openxmlformats.org/drawingml/2006/main">
               <a:ext uri="{FF2B5EF4-FFF2-40B4-BE49-F238E27FC236}">
-                <a16:creationId xmlns:a16="http://schemas.microsoft.com/office/drawing/2014/main" id="{9AECDE8C-5A48-4150-9C64-07598CE492F9}"/>
+                <a16:creationId xmlns:a16="http://schemas.microsoft.com/office/drawing/2014/main" id="{2086B069-9DFA-49B3-84F9-F75A2A49ED4C}"/>
               </a:ext>
             </a:extLst>
           </p:cNvPr>
@@ -6382,7 +6382,7 @@
           <p:cNvPr id="18" name="">
             <a:extLst xmlns:a="http://schemas.openxmlformats.org/drawingml/2006/main">
               <a:ext uri="{FF2B5EF4-FFF2-40B4-BE49-F238E27FC236}">
-                <a16:creationId xmlns:a16="http://schemas.microsoft.com/office/drawing/2014/main" id="{C01139E0-E62D-4450-AE4C-8A1EC2A0DA25}"/>
+                <a16:creationId xmlns:a16="http://schemas.microsoft.com/office/drawing/2014/main" id="{B2927F12-9B13-4DB6-A709-F4FC57507324}"/>
               </a:ext>
             </a:extLst>
           </p:cNvPr>
@@ -6416,7 +6416,7 @@
           <p:cNvPr id="19" name="">
             <a:extLst xmlns:a="http://schemas.openxmlformats.org/drawingml/2006/main">
               <a:ext uri="{FF2B5EF4-FFF2-40B4-BE49-F238E27FC236}">
-                <a16:creationId xmlns:a16="http://schemas.microsoft.com/office/drawing/2014/main" id="{C937FE5A-468D-49C8-B2CF-57CCEE1EECB7}"/>
+                <a16:creationId xmlns:a16="http://schemas.microsoft.com/office/drawing/2014/main" id="{3CE6395B-ECBE-4BFD-8897-8D90F43A5537}"/>
               </a:ext>
             </a:extLst>
           </p:cNvPr>
@@ -6448,7 +6448,7 @@
           <p:cNvPr id="20" name="">
             <a:extLst xmlns:a="http://schemas.openxmlformats.org/drawingml/2006/main">
               <a:ext uri="{FF2B5EF4-FFF2-40B4-BE49-F238E27FC236}">
-                <a16:creationId xmlns:a16="http://schemas.microsoft.com/office/drawing/2014/main" id="{71E2C945-E64B-46E1-B7A8-003E9E0F945C}"/>
+                <a16:creationId xmlns:a16="http://schemas.microsoft.com/office/drawing/2014/main" id="{E23F8F46-0DF1-46D1-8B58-9E1817348DC3}"/>
               </a:ext>
             </a:extLst>
           </p:cNvPr>
@@ -6505,7 +6505,7 @@
           <p:cNvPr id="21" name="">
             <a:extLst xmlns:a="http://schemas.openxmlformats.org/drawingml/2006/main">
               <a:ext uri="{FF2B5EF4-FFF2-40B4-BE49-F238E27FC236}">
-                <a16:creationId xmlns:a16="http://schemas.microsoft.com/office/drawing/2014/main" id="{AEB02A1B-59B5-4CD8-80FE-A7F7DF9B030B}"/>
+                <a16:creationId xmlns:a16="http://schemas.microsoft.com/office/drawing/2014/main" id="{B77B4311-8A1A-481C-ACFF-347FA472A8D6}"/>
               </a:ext>
             </a:extLst>
           </p:cNvPr>
@@ -6562,7 +6562,7 @@
           <p:cNvPr id="22" name="">
             <a:extLst xmlns:a="http://schemas.openxmlformats.org/drawingml/2006/main">
               <a:ext uri="{FF2B5EF4-FFF2-40B4-BE49-F238E27FC236}">
-                <a16:creationId xmlns:a16="http://schemas.microsoft.com/office/drawing/2014/main" id="{11259B8F-05F2-47ED-AFCE-BC62B7ABF37A}"/>
+                <a16:creationId xmlns:a16="http://schemas.microsoft.com/office/drawing/2014/main" id="{5076647E-DAFF-4B1E-A5A1-08FCB138A23F}"/>
               </a:ext>
             </a:extLst>
           </p:cNvPr>
@@ -6617,7 +6617,7 @@
     </p:spTree>
     <p:extLst>
       <p:ext uri="{BB962C8B-B14F-4D97-AF65-F5344CB8AC3E}">
-        <p14:creationId xmlns:p14="http://schemas.microsoft.com/office/powerpoint/2010/main" val="287209542"/>
+        <p14:creationId xmlns:p14="http://schemas.microsoft.com/office/powerpoint/2010/main" val="864328581"/>
       </p:ext>
     </p:extLst>
   </p:cSld>
@@ -6818,7 +6818,7 @@
           <p:cNvPr id="16" name="">
             <a:extLst xmlns:a="http://schemas.openxmlformats.org/drawingml/2006/main">
               <a:ext uri="{FF2B5EF4-FFF2-40B4-BE49-F238E27FC236}">
-                <a16:creationId xmlns:a16="http://schemas.microsoft.com/office/drawing/2014/main" id="{B587F735-52EC-46E4-AE9C-D51B0EFAABBA}"/>
+                <a16:creationId xmlns:a16="http://schemas.microsoft.com/office/drawing/2014/main" id="{63721E6B-7B62-4B84-BC1C-D42FA5C6ECDB}"/>
               </a:ext>
             </a:extLst>
           </p:cNvPr>
@@ -6850,7 +6850,7 @@
           <p:cNvPr id="2" name="">
             <a:extLst xmlns:a="http://schemas.openxmlformats.org/drawingml/2006/main">
               <a:ext uri="{FF2B5EF4-FFF2-40B4-BE49-F238E27FC236}">
-                <a16:creationId xmlns:a16="http://schemas.microsoft.com/office/drawing/2014/main" id="{ABFD96C6-E5B6-4700-82A0-57F87E3CDFE7}"/>
+                <a16:creationId xmlns:a16="http://schemas.microsoft.com/office/drawing/2014/main" id="{BFEADCA4-EFC9-4160-BAFF-DC18673F6421}"/>
               </a:ext>
             </a:extLst>
           </p:cNvPr>
@@ -6907,7 +6907,7 @@
           <p:cNvPr id="3" name="">
             <a:extLst xmlns:a="http://schemas.openxmlformats.org/drawingml/2006/main">
               <a:ext uri="{FF2B5EF4-FFF2-40B4-BE49-F238E27FC236}">
-                <a16:creationId xmlns:a16="http://schemas.microsoft.com/office/drawing/2014/main" id="{D1A4B191-993D-4B77-9662-0A59A4DA2EC6}"/>
+                <a16:creationId xmlns:a16="http://schemas.microsoft.com/office/drawing/2014/main" id="{5F5DD162-FC23-4D3D-8989-03292865DCB5}"/>
               </a:ext>
             </a:extLst>
           </p:cNvPr>
@@ -6939,7 +6939,7 @@
           <p:cNvPr id="4" name="">
             <a:extLst xmlns:a="http://schemas.openxmlformats.org/drawingml/2006/main">
               <a:ext uri="{FF2B5EF4-FFF2-40B4-BE49-F238E27FC236}">
-                <a16:creationId xmlns:a16="http://schemas.microsoft.com/office/drawing/2014/main" id="{EE19EEAA-8965-4DE9-A177-EE9E666E1E6B}"/>
+                <a16:creationId xmlns:a16="http://schemas.microsoft.com/office/drawing/2014/main" id="{D27D0183-D6D7-4752-8BA2-FD902938B949}"/>
               </a:ext>
             </a:extLst>
           </p:cNvPr>
@@ -6996,7 +6996,7 @@
           <p:cNvPr id="5" name="">
             <a:extLst xmlns:a="http://schemas.openxmlformats.org/drawingml/2006/main">
               <a:ext uri="{FF2B5EF4-FFF2-40B4-BE49-F238E27FC236}">
-                <a16:creationId xmlns:a16="http://schemas.microsoft.com/office/drawing/2014/main" id="{D7662978-98D8-4A13-984D-8E1669D3C211}"/>
+                <a16:creationId xmlns:a16="http://schemas.microsoft.com/office/drawing/2014/main" id="{4ECE0447-ACFA-4AC0-9FD2-210E8DE3AC00}"/>
               </a:ext>
             </a:extLst>
           </p:cNvPr>
@@ -7053,7 +7053,7 @@
           <p:cNvPr id="6" name="">
             <a:extLst xmlns:a="http://schemas.openxmlformats.org/drawingml/2006/main">
               <a:ext uri="{FF2B5EF4-FFF2-40B4-BE49-F238E27FC236}">
-                <a16:creationId xmlns:a16="http://schemas.microsoft.com/office/drawing/2014/main" id="{298C0816-758F-4927-875B-D303A2A432EE}"/>
+                <a16:creationId xmlns:a16="http://schemas.microsoft.com/office/drawing/2014/main" id="{682AE8AE-B881-470F-B3C7-41C7A03DE7D7}"/>
               </a:ext>
             </a:extLst>
           </p:cNvPr>
@@ -7110,7 +7110,7 @@
           <p:cNvPr id="7" name="">
             <a:extLst xmlns:a="http://schemas.openxmlformats.org/drawingml/2006/main">
               <a:ext uri="{FF2B5EF4-FFF2-40B4-BE49-F238E27FC236}">
-                <a16:creationId xmlns:a16="http://schemas.microsoft.com/office/drawing/2014/main" id="{8BC099CA-E221-4F3E-823D-D5076D39F4CF}"/>
+                <a16:creationId xmlns:a16="http://schemas.microsoft.com/office/drawing/2014/main" id="{59FE3823-8292-4D65-A11B-A52E6FF7CD69}"/>
               </a:ext>
             </a:extLst>
           </p:cNvPr>
@@ -7142,7 +7142,7 @@
           <p:cNvPr id="8" name="">
             <a:extLst xmlns:a="http://schemas.openxmlformats.org/drawingml/2006/main">
               <a:ext uri="{FF2B5EF4-FFF2-40B4-BE49-F238E27FC236}">
-                <a16:creationId xmlns:a16="http://schemas.microsoft.com/office/drawing/2014/main" id="{258D0EB9-40DD-45A7-A3EC-C17C6D9A569F}"/>
+                <a16:creationId xmlns:a16="http://schemas.microsoft.com/office/drawing/2014/main" id="{D5C9F5FB-59C0-46A4-A385-C7B4EB3ABF8A}"/>
               </a:ext>
             </a:extLst>
           </p:cNvPr>
@@ -7199,7 +7199,7 @@
           <p:cNvPr id="9" name="">
             <a:extLst xmlns:a="http://schemas.openxmlformats.org/drawingml/2006/main">
               <a:ext uri="{FF2B5EF4-FFF2-40B4-BE49-F238E27FC236}">
-                <a16:creationId xmlns:a16="http://schemas.microsoft.com/office/drawing/2014/main" id="{BFF593AC-8000-44A6-9DAF-577BF4569834}"/>
+                <a16:creationId xmlns:a16="http://schemas.microsoft.com/office/drawing/2014/main" id="{06A74E55-C97F-4FF1-B4AE-B15BDE516FFE}"/>
               </a:ext>
             </a:extLst>
           </p:cNvPr>
@@ -7256,7 +7256,7 @@
           <p:cNvPr id="10" name="">
             <a:extLst xmlns:a="http://schemas.openxmlformats.org/drawingml/2006/main">
               <a:ext uri="{FF2B5EF4-FFF2-40B4-BE49-F238E27FC236}">
-                <a16:creationId xmlns:a16="http://schemas.microsoft.com/office/drawing/2014/main" id="{C4925856-A47E-46DA-97F5-FDBEBF6F2D19}"/>
+                <a16:creationId xmlns:a16="http://schemas.microsoft.com/office/drawing/2014/main" id="{A92524AC-FDAC-44A8-96C0-B8F181368D37}"/>
               </a:ext>
             </a:extLst>
           </p:cNvPr>
@@ -7313,7 +7313,7 @@
           <p:cNvPr id="11" name="">
             <a:extLst xmlns:a="http://schemas.openxmlformats.org/drawingml/2006/main">
               <a:ext uri="{FF2B5EF4-FFF2-40B4-BE49-F238E27FC236}">
-                <a16:creationId xmlns:a16="http://schemas.microsoft.com/office/drawing/2014/main" id="{5E7BAB26-31A8-4006-9111-9CE1221DE573}"/>
+                <a16:creationId xmlns:a16="http://schemas.microsoft.com/office/drawing/2014/main" id="{CFBAC453-6D8A-4F76-B09F-182F4033463A}"/>
               </a:ext>
             </a:extLst>
           </p:cNvPr>
@@ -7345,7 +7345,7 @@
           <p:cNvPr id="12" name="">
             <a:extLst xmlns:a="http://schemas.openxmlformats.org/drawingml/2006/main">
               <a:ext uri="{FF2B5EF4-FFF2-40B4-BE49-F238E27FC236}">
-                <a16:creationId xmlns:a16="http://schemas.microsoft.com/office/drawing/2014/main" id="{04367502-0EFB-4842-82B6-53F42BEAE94B}"/>
+                <a16:creationId xmlns:a16="http://schemas.microsoft.com/office/drawing/2014/main" id="{5C3A62AA-5A86-410C-94DE-253E47C916F5}"/>
               </a:ext>
             </a:extLst>
           </p:cNvPr>
@@ -7402,7 +7402,7 @@
           <p:cNvPr id="13" name="">
             <a:extLst xmlns:a="http://schemas.openxmlformats.org/drawingml/2006/main">
               <a:ext uri="{FF2B5EF4-FFF2-40B4-BE49-F238E27FC236}">
-                <a16:creationId xmlns:a16="http://schemas.microsoft.com/office/drawing/2014/main" id="{29D8EC07-CDA2-4CE9-93A5-D0471C2EAC75}"/>
+                <a16:creationId xmlns:a16="http://schemas.microsoft.com/office/drawing/2014/main" id="{728197E4-C1D5-4635-96E9-71E3BD9FBCA9}"/>
               </a:ext>
             </a:extLst>
           </p:cNvPr>
@@ -7459,7 +7459,7 @@
           <p:cNvPr id="14" name="">
             <a:extLst xmlns:a="http://schemas.openxmlformats.org/drawingml/2006/main">
               <a:ext uri="{FF2B5EF4-FFF2-40B4-BE49-F238E27FC236}">
-                <a16:creationId xmlns:a16="http://schemas.microsoft.com/office/drawing/2014/main" id="{266D44F4-1A7D-4B53-BACE-6FCED267381C}"/>
+                <a16:creationId xmlns:a16="http://schemas.microsoft.com/office/drawing/2014/main" id="{CA6E989B-4A82-4811-98ED-2C616B3F8376}"/>
               </a:ext>
             </a:extLst>
           </p:cNvPr>
@@ -7516,7 +7516,7 @@
           <p:cNvPr id="15" name="">
             <a:extLst xmlns:a="http://schemas.openxmlformats.org/drawingml/2006/main">
               <a:ext uri="{FF2B5EF4-FFF2-40B4-BE49-F238E27FC236}">
-                <a16:creationId xmlns:a16="http://schemas.microsoft.com/office/drawing/2014/main" id="{07158D0C-43B4-4988-8F33-C469C683173B}"/>
+                <a16:creationId xmlns:a16="http://schemas.microsoft.com/office/drawing/2014/main" id="{E2D7D180-2F0B-47A2-A066-880DCB9A61F6}"/>
               </a:ext>
             </a:extLst>
           </p:cNvPr>
@@ -7571,7 +7571,7 @@
     </p:spTree>
     <p:extLst>
       <p:ext uri="{BB962C8B-B14F-4D97-AF65-F5344CB8AC3E}">
-        <p14:creationId xmlns:p14="http://schemas.microsoft.com/office/powerpoint/2010/main" val="615126443"/>
+        <p14:creationId xmlns:p14="http://schemas.microsoft.com/office/powerpoint/2010/main" val="418913942"/>
       </p:ext>
     </p:extLst>
   </p:cSld>
@@ -7772,7 +7772,7 @@
           <p:cNvPr id="23" name="">
             <a:extLst xmlns:a="http://schemas.openxmlformats.org/drawingml/2006/main">
               <a:ext uri="{FF2B5EF4-FFF2-40B4-BE49-F238E27FC236}">
-                <a16:creationId xmlns:a16="http://schemas.microsoft.com/office/drawing/2014/main" id="{B724C8E7-5622-44E4-A4B3-719F70FD4558}"/>
+                <a16:creationId xmlns:a16="http://schemas.microsoft.com/office/drawing/2014/main" id="{E2E33DF2-0F7A-428E-9D81-AE0BAF1D9EC0}"/>
               </a:ext>
             </a:extLst>
           </p:cNvPr>
@@ -7804,7 +7804,7 @@
           <p:cNvPr id="2" name="">
             <a:extLst xmlns:a="http://schemas.openxmlformats.org/drawingml/2006/main">
               <a:ext uri="{FF2B5EF4-FFF2-40B4-BE49-F238E27FC236}">
-                <a16:creationId xmlns:a16="http://schemas.microsoft.com/office/drawing/2014/main" id="{E2FF4FA3-0E45-4541-A97F-0988352874B1}"/>
+                <a16:creationId xmlns:a16="http://schemas.microsoft.com/office/drawing/2014/main" id="{EA362609-E604-411D-AB81-065B908371E6}"/>
               </a:ext>
             </a:extLst>
           </p:cNvPr>
@@ -7861,7 +7861,7 @@
           <p:cNvPr id="3" name="">
             <a:extLst xmlns:a="http://schemas.openxmlformats.org/drawingml/2006/main">
               <a:ext uri="{FF2B5EF4-FFF2-40B4-BE49-F238E27FC236}">
-                <a16:creationId xmlns:a16="http://schemas.microsoft.com/office/drawing/2014/main" id="{B2758547-4087-4DE7-96BA-ECFE1C899120}"/>
+                <a16:creationId xmlns:a16="http://schemas.microsoft.com/office/drawing/2014/main" id="{FC37F01C-D308-4E9E-8AA8-D63194A0AB57}"/>
               </a:ext>
             </a:extLst>
           </p:cNvPr>
@@ -7893,7 +7893,7 @@
           <p:cNvPr id="4" name="">
             <a:extLst xmlns:a="http://schemas.openxmlformats.org/drawingml/2006/main">
               <a:ext uri="{FF2B5EF4-FFF2-40B4-BE49-F238E27FC236}">
-                <a16:creationId xmlns:a16="http://schemas.microsoft.com/office/drawing/2014/main" id="{6A2B18DC-B38E-40B4-9CD3-01D6C395C949}"/>
+                <a16:creationId xmlns:a16="http://schemas.microsoft.com/office/drawing/2014/main" id="{18FC4728-3F3D-4BB3-AD9A-67650C73F94E}"/>
               </a:ext>
             </a:extLst>
           </p:cNvPr>
@@ -7950,7 +7950,7 @@
           <p:cNvPr id="5" name="">
             <a:extLst xmlns:a="http://schemas.openxmlformats.org/drawingml/2006/main">
               <a:ext uri="{FF2B5EF4-FFF2-40B4-BE49-F238E27FC236}">
-                <a16:creationId xmlns:a16="http://schemas.microsoft.com/office/drawing/2014/main" id="{49F45B56-53C6-4B33-836C-9056370EE2CC}"/>
+                <a16:creationId xmlns:a16="http://schemas.microsoft.com/office/drawing/2014/main" id="{068303CA-5E0B-42AB-B6E5-F93BFDF91B00}"/>
               </a:ext>
             </a:extLst>
           </p:cNvPr>
@@ -8007,7 +8007,7 @@
           <p:cNvPr id="6" name="">
             <a:extLst xmlns:a="http://schemas.openxmlformats.org/drawingml/2006/main">
               <a:ext uri="{FF2B5EF4-FFF2-40B4-BE49-F238E27FC236}">
-                <a16:creationId xmlns:a16="http://schemas.microsoft.com/office/drawing/2014/main" id="{1637203C-EF8A-47D8-AB38-F4709E03DAFD}"/>
+                <a16:creationId xmlns:a16="http://schemas.microsoft.com/office/drawing/2014/main" id="{34ABEC9B-37B1-411D-96CE-7D6EF9DBE10A}"/>
               </a:ext>
             </a:extLst>
           </p:cNvPr>
@@ -8064,7 +8064,7 @@
           <p:cNvPr id="7" name="">
             <a:extLst xmlns:a="http://schemas.openxmlformats.org/drawingml/2006/main">
               <a:ext uri="{FF2B5EF4-FFF2-40B4-BE49-F238E27FC236}">
-                <a16:creationId xmlns:a16="http://schemas.microsoft.com/office/drawing/2014/main" id="{23547AE9-D122-4F86-A56B-2F474D907565}"/>
+                <a16:creationId xmlns:a16="http://schemas.microsoft.com/office/drawing/2014/main" id="{98041A5F-5137-4D7F-8840-BBE6165ECE07}"/>
               </a:ext>
             </a:extLst>
           </p:cNvPr>
@@ -8096,7 +8096,7 @@
           <p:cNvPr id="8" name="">
             <a:extLst xmlns:a="http://schemas.openxmlformats.org/drawingml/2006/main">
               <a:ext uri="{FF2B5EF4-FFF2-40B4-BE49-F238E27FC236}">
-                <a16:creationId xmlns:a16="http://schemas.microsoft.com/office/drawing/2014/main" id="{FAEA9C50-DB24-470D-B3F1-5BB69EC25BFA}"/>
+                <a16:creationId xmlns:a16="http://schemas.microsoft.com/office/drawing/2014/main" id="{0F1B96A2-7AC4-4609-BDA4-2F82BA058F72}"/>
               </a:ext>
             </a:extLst>
           </p:cNvPr>
@@ -8153,7 +8153,7 @@
           <p:cNvPr id="9" name="">
             <a:extLst xmlns:a="http://schemas.openxmlformats.org/drawingml/2006/main">
               <a:ext uri="{FF2B5EF4-FFF2-40B4-BE49-F238E27FC236}">
-                <a16:creationId xmlns:a16="http://schemas.microsoft.com/office/drawing/2014/main" id="{16C56E6A-1274-4AE9-BAF8-FD62EBE8F97D}"/>
+                <a16:creationId xmlns:a16="http://schemas.microsoft.com/office/drawing/2014/main" id="{25574FC9-CC4A-4DD5-96C4-A4B673F67AC7}"/>
               </a:ext>
             </a:extLst>
           </p:cNvPr>
@@ -8210,19 +8210,19 @@
           <p:cNvPr id="10" name="">
             <a:extLst xmlns:a="http://schemas.openxmlformats.org/drawingml/2006/main">
               <a:ext uri="{FF2B5EF4-FFF2-40B4-BE49-F238E27FC236}">
-                <a16:creationId xmlns:a16="http://schemas.microsoft.com/office/drawing/2014/main" id="{C14B8278-CE12-4AA0-B04E-843C800E6873}"/>
-              </a:ext>
-            </a:extLst>
-          </p:cNvPr>
-          <p:cNvSpPr>
-            <a:spLocks xmlns:a="http://schemas.openxmlformats.org/drawingml/2006/main" noGrp="1"/>
-          </p:cNvSpPr>
-          <p:nvPr/>
-        </p:nvSpPr>
-        <p:spPr>
-          <a:xfrm xmlns:a="http://schemas.openxmlformats.org/drawingml/2006/main">
-            <a:off x="914400" y="1257300"/>
-            <a:ext cx="10363200" cy="781050"/>
+                <a16:creationId xmlns:a16="http://schemas.microsoft.com/office/drawing/2014/main" id="{6AD2A20B-FF50-44DD-9532-0B42B43D1404}"/>
+              </a:ext>
+            </a:extLst>
+          </p:cNvPr>
+          <p:cNvSpPr>
+            <a:spLocks xmlns:a="http://schemas.openxmlformats.org/drawingml/2006/main" noGrp="1"/>
+          </p:cNvSpPr>
+          <p:nvPr/>
+        </p:nvSpPr>
+        <p:spPr>
+          <a:xfrm xmlns:a="http://schemas.openxmlformats.org/drawingml/2006/main">
+            <a:off x="857250" y="1219200"/>
+            <a:ext cx="10477500" cy="742950"/>
           </a:xfrm>
           <a:prstGeom xmlns:a="http://schemas.openxmlformats.org/drawingml/2006/main" prst="rect">
             <a:avLst/>
@@ -8239,7 +8239,7 @@
           <a:lstStyle xmlns:a="http://schemas.openxmlformats.org/drawingml/2006/main"/>
           <a:p xmlns:a="http://schemas.openxmlformats.org/drawingml/2006/main">
             <a:pPr algn="ctr">
-              <a:defRPr sz="2175" b="1">
+              <a:defRPr sz="2100" b="1">
                 <a:solidFill>
                   <a:srgbClr val="17253A"/>
                 </a:solidFill>
@@ -8249,7 +8249,7 @@
               </a:defRPr>
             </a:pPr>
             <a:r>
-              <a:rPr sz="2175" b="1">
+              <a:rPr sz="2100" b="1">
                 <a:solidFill>
                   <a:srgbClr val="17253A"/>
                 </a:solidFill>
@@ -8267,28 +8267,30 @@
           <p:cNvPr id="11" name="">
             <a:extLst xmlns:a="http://schemas.openxmlformats.org/drawingml/2006/main">
               <a:ext uri="{FF2B5EF4-FFF2-40B4-BE49-F238E27FC236}">
-                <a16:creationId xmlns:a16="http://schemas.microsoft.com/office/drawing/2014/main" id="{687F4902-4151-4612-8CAD-1472D78216D2}"/>
-              </a:ext>
-            </a:extLst>
-          </p:cNvPr>
-          <p:cNvSpPr>
-            <a:spLocks xmlns:a="http://schemas.openxmlformats.org/drawingml/2006/main" noGrp="1"/>
-          </p:cNvSpPr>
-          <p:nvPr/>
-        </p:nvSpPr>
-        <p:spPr>
-          <a:xfrm xmlns:a="http://schemas.openxmlformats.org/drawingml/2006/main">
-            <a:off x="1000125" y="2247900"/>
-            <a:ext cx="476250" cy="476250"/>
-          </a:xfrm>
-          <a:prstGeom xmlns:a="http://schemas.openxmlformats.org/drawingml/2006/main" prst="ellipse">
+                <a16:creationId xmlns:a16="http://schemas.microsoft.com/office/drawing/2014/main" id="{CEE591A2-E52D-4B6B-A8C0-E27E2CB170E2}"/>
+              </a:ext>
+            </a:extLst>
+          </p:cNvPr>
+          <p:cNvSpPr>
+            <a:spLocks xmlns:a="http://schemas.openxmlformats.org/drawingml/2006/main" noGrp="1"/>
+          </p:cNvSpPr>
+          <p:nvPr/>
+        </p:nvSpPr>
+        <p:spPr>
+          <a:xfrm xmlns:a="http://schemas.openxmlformats.org/drawingml/2006/main">
+            <a:off x="971550" y="2124075"/>
+            <a:ext cx="38100" cy="3524250"/>
+          </a:xfrm>
+          <a:prstGeom xmlns:a="http://schemas.openxmlformats.org/drawingml/2006/main" prst="rect">
             <a:avLst/>
           </a:prstGeom>
           <a:solidFill xmlns:a="http://schemas.openxmlformats.org/drawingml/2006/main">
-            <a:srgbClr val="18324A"/>
+            <a:srgbClr val="2C6E73"/>
           </a:solidFill>
           <a:ln xmlns:a="http://schemas.openxmlformats.org/drawingml/2006/main" w="0">
-            <a:noFill/>
+            <a:solidFill>
+              <a:srgbClr val="2C6E73"/>
+            </a:solidFill>
           </a:ln>
         </p:spPr>
       </p:sp>
@@ -8297,19 +8299,19 @@
           <p:cNvPr id="12" name="">
             <a:extLst xmlns:a="http://schemas.openxmlformats.org/drawingml/2006/main">
               <a:ext uri="{FF2B5EF4-FFF2-40B4-BE49-F238E27FC236}">
-                <a16:creationId xmlns:a16="http://schemas.microsoft.com/office/drawing/2014/main" id="{7CAD6C84-C100-4C03-AAB2-17E576AF6F17}"/>
-              </a:ext>
-            </a:extLst>
-          </p:cNvPr>
-          <p:cNvSpPr>
-            <a:spLocks xmlns:a="http://schemas.openxmlformats.org/drawingml/2006/main" noGrp="1"/>
-          </p:cNvSpPr>
-          <p:nvPr/>
-        </p:nvSpPr>
-        <p:spPr>
-          <a:xfrm xmlns:a="http://schemas.openxmlformats.org/drawingml/2006/main">
-            <a:off x="1000125" y="2276475"/>
-            <a:ext cx="476250" cy="419100"/>
+                <a16:creationId xmlns:a16="http://schemas.microsoft.com/office/drawing/2014/main" id="{04DCFE38-B850-491C-BFF7-03C2F7B24B19}"/>
+              </a:ext>
+            </a:extLst>
+          </p:cNvPr>
+          <p:cNvSpPr>
+            <a:spLocks xmlns:a="http://schemas.openxmlformats.org/drawingml/2006/main" noGrp="1"/>
+          </p:cNvSpPr>
+          <p:nvPr/>
+        </p:nvSpPr>
+        <p:spPr>
+          <a:xfrm xmlns:a="http://schemas.openxmlformats.org/drawingml/2006/main">
+            <a:off x="1162050" y="2200275"/>
+            <a:ext cx="400050" cy="400050"/>
           </a:xfrm>
           <a:prstGeom xmlns:a="http://schemas.openxmlformats.org/drawingml/2006/main" prst="rect">
             <a:avLst/>
@@ -8326,9 +8328,9 @@
           <a:lstStyle xmlns:a="http://schemas.openxmlformats.org/drawingml/2006/main"/>
           <a:p xmlns:a="http://schemas.openxmlformats.org/drawingml/2006/main">
             <a:pPr algn="ctr">
-              <a:defRPr sz="1350" b="1">
-                <a:solidFill>
-                  <a:srgbClr val="FFFFFF"/>
+              <a:defRPr sz="1125" b="1">
+                <a:solidFill>
+                  <a:srgbClr val="2C6E73"/>
                 </a:solidFill>
                 <a:latin typeface="Arial"/>
                 <a:ea typeface="Arial"/>
@@ -8336,9 +8338,9 @@
               </a:defRPr>
             </a:pPr>
             <a:r>
-              <a:rPr sz="1350" b="1">
-                <a:solidFill>
-                  <a:srgbClr val="FFFFFF"/>
+              <a:rPr sz="1125" b="1">
+                <a:solidFill>
+                  <a:srgbClr val="2C6E73"/>
                 </a:solidFill>
                 <a:latin typeface="Arial"/>
                 <a:ea typeface="Arial"/>
@@ -8354,19 +8356,19 @@
           <p:cNvPr id="13" name="">
             <a:extLst xmlns:a="http://schemas.openxmlformats.org/drawingml/2006/main">
               <a:ext uri="{FF2B5EF4-FFF2-40B4-BE49-F238E27FC236}">
-                <a16:creationId xmlns:a16="http://schemas.microsoft.com/office/drawing/2014/main" id="{7826D553-B3E3-45E5-AED3-4B7CAEA4F874}"/>
-              </a:ext>
-            </a:extLst>
-          </p:cNvPr>
-          <p:cNvSpPr>
-            <a:spLocks xmlns:a="http://schemas.openxmlformats.org/drawingml/2006/main" noGrp="1"/>
-          </p:cNvSpPr>
-          <p:nvPr/>
-        </p:nvSpPr>
-        <p:spPr>
-          <a:xfrm xmlns:a="http://schemas.openxmlformats.org/drawingml/2006/main">
-            <a:off x="1714500" y="2181225"/>
-            <a:ext cx="9429750" cy="609600"/>
+                <a16:creationId xmlns:a16="http://schemas.microsoft.com/office/drawing/2014/main" id="{274DB3D9-4CE4-4247-8860-1809384F7EC7}"/>
+              </a:ext>
+            </a:extLst>
+          </p:cNvPr>
+          <p:cNvSpPr>
+            <a:spLocks xmlns:a="http://schemas.openxmlformats.org/drawingml/2006/main" noGrp="1"/>
+          </p:cNvSpPr>
+          <p:nvPr/>
+        </p:nvSpPr>
+        <p:spPr>
+          <a:xfrm xmlns:a="http://schemas.openxmlformats.org/drawingml/2006/main">
+            <a:off x="1714500" y="2114550"/>
+            <a:ext cx="9525000" cy="809625"/>
           </a:xfrm>
           <a:prstGeom xmlns:a="http://schemas.openxmlformats.org/drawingml/2006/main" prst="rect">
             <a:avLst/>
@@ -8383,7 +8385,7 @@
           <a:lstStyle xmlns:a="http://schemas.openxmlformats.org/drawingml/2006/main"/>
           <a:p xmlns:a="http://schemas.openxmlformats.org/drawingml/2006/main">
             <a:pPr algn="l">
-              <a:defRPr sz="1500" b="0">
+              <a:defRPr sz="1725" b="0">
                 <a:solidFill>
                   <a:srgbClr val="17253A"/>
                 </a:solidFill>
@@ -8393,7 +8395,7 @@
               </a:defRPr>
             </a:pPr>
             <a:r>
-              <a:rPr sz="1500" b="0">
+              <a:rPr sz="1725" b="0">
                 <a:solidFill>
                   <a:srgbClr val="17253A"/>
                 </a:solidFill>
@@ -8401,7 +8403,7 @@
                 <a:ea typeface="Arial"/>
                 <a:cs typeface="Arial"/>
               </a:rPr>
-              <a:t>Identify the structure: Identify the required measure and mark the relevant lengths.</a:t>
+              <a:t>Triangle base = 15 cm, perpendicular height = 8 cm</a:t>
             </a:r>
           </a:p>
         </p:txBody>
@@ -8411,28 +8413,30 @@
           <p:cNvPr id="14" name="">
             <a:extLst xmlns:a="http://schemas.openxmlformats.org/drawingml/2006/main">
               <a:ext uri="{FF2B5EF4-FFF2-40B4-BE49-F238E27FC236}">
-                <a16:creationId xmlns:a16="http://schemas.microsoft.com/office/drawing/2014/main" id="{7FEC4605-3E06-48E5-AB0C-9FB240C64BEB}"/>
-              </a:ext>
-            </a:extLst>
-          </p:cNvPr>
-          <p:cNvSpPr>
-            <a:spLocks xmlns:a="http://schemas.openxmlformats.org/drawingml/2006/main" noGrp="1"/>
-          </p:cNvSpPr>
-          <p:nvPr/>
-        </p:nvSpPr>
-        <p:spPr>
-          <a:xfrm xmlns:a="http://schemas.openxmlformats.org/drawingml/2006/main">
-            <a:off x="1000125" y="2990850"/>
-            <a:ext cx="476250" cy="476250"/>
-          </a:xfrm>
-          <a:prstGeom xmlns:a="http://schemas.openxmlformats.org/drawingml/2006/main" prst="ellipse">
+                <a16:creationId xmlns:a16="http://schemas.microsoft.com/office/drawing/2014/main" id="{E6D58699-E68B-46E7-BC24-30238C117936}"/>
+              </a:ext>
+            </a:extLst>
+          </p:cNvPr>
+          <p:cNvSpPr>
+            <a:spLocks xmlns:a="http://schemas.openxmlformats.org/drawingml/2006/main" noGrp="1"/>
+          </p:cNvSpPr>
+          <p:nvPr/>
+        </p:nvSpPr>
+        <p:spPr>
+          <a:xfrm xmlns:a="http://schemas.openxmlformats.org/drawingml/2006/main">
+            <a:off x="1714500" y="2943225"/>
+            <a:ext cx="9334500" cy="9525"/>
+          </a:xfrm>
+          <a:prstGeom xmlns:a="http://schemas.openxmlformats.org/drawingml/2006/main" prst="rect">
             <a:avLst/>
           </a:prstGeom>
           <a:solidFill xmlns:a="http://schemas.openxmlformats.org/drawingml/2006/main">
-            <a:srgbClr val="2C6E73"/>
+            <a:srgbClr val="D9E0E6"/>
           </a:solidFill>
           <a:ln xmlns:a="http://schemas.openxmlformats.org/drawingml/2006/main" w="0">
-            <a:noFill/>
+            <a:solidFill>
+              <a:srgbClr val="D9E0E6"/>
+            </a:solidFill>
           </a:ln>
         </p:spPr>
       </p:sp>
@@ -8441,19 +8445,19 @@
           <p:cNvPr id="15" name="">
             <a:extLst xmlns:a="http://schemas.openxmlformats.org/drawingml/2006/main">
               <a:ext uri="{FF2B5EF4-FFF2-40B4-BE49-F238E27FC236}">
-                <a16:creationId xmlns:a16="http://schemas.microsoft.com/office/drawing/2014/main" id="{972F004F-14E6-4230-AB5D-745EA10ACB76}"/>
-              </a:ext>
-            </a:extLst>
-          </p:cNvPr>
-          <p:cNvSpPr>
-            <a:spLocks xmlns:a="http://schemas.openxmlformats.org/drawingml/2006/main" noGrp="1"/>
-          </p:cNvSpPr>
-          <p:nvPr/>
-        </p:nvSpPr>
-        <p:spPr>
-          <a:xfrm xmlns:a="http://schemas.openxmlformats.org/drawingml/2006/main">
-            <a:off x="1000125" y="3019425"/>
-            <a:ext cx="476250" cy="419100"/>
+                <a16:creationId xmlns:a16="http://schemas.microsoft.com/office/drawing/2014/main" id="{B608BB24-044E-48FF-B508-0612D6AC13A5}"/>
+              </a:ext>
+            </a:extLst>
+          </p:cNvPr>
+          <p:cNvSpPr>
+            <a:spLocks xmlns:a="http://schemas.openxmlformats.org/drawingml/2006/main" noGrp="1"/>
+          </p:cNvSpPr>
+          <p:nvPr/>
+        </p:nvSpPr>
+        <p:spPr>
+          <a:xfrm xmlns:a="http://schemas.openxmlformats.org/drawingml/2006/main">
+            <a:off x="1162050" y="3076575"/>
+            <a:ext cx="400050" cy="400050"/>
           </a:xfrm>
           <a:prstGeom xmlns:a="http://schemas.openxmlformats.org/drawingml/2006/main" prst="rect">
             <a:avLst/>
@@ -8470,9 +8474,9 @@
           <a:lstStyle xmlns:a="http://schemas.openxmlformats.org/drawingml/2006/main"/>
           <a:p xmlns:a="http://schemas.openxmlformats.org/drawingml/2006/main">
             <a:pPr algn="ctr">
-              <a:defRPr sz="1350" b="1">
-                <a:solidFill>
-                  <a:srgbClr val="FFFFFF"/>
+              <a:defRPr sz="1125" b="1">
+                <a:solidFill>
+                  <a:srgbClr val="2C6E73"/>
                 </a:solidFill>
                 <a:latin typeface="Arial"/>
                 <a:ea typeface="Arial"/>
@@ -8480,9 +8484,9 @@
               </a:defRPr>
             </a:pPr>
             <a:r>
-              <a:rPr sz="1350" b="1">
-                <a:solidFill>
-                  <a:srgbClr val="FFFFFF"/>
+              <a:rPr sz="1125" b="1">
+                <a:solidFill>
+                  <a:srgbClr val="2C6E73"/>
                 </a:solidFill>
                 <a:latin typeface="Arial"/>
                 <a:ea typeface="Arial"/>
@@ -8498,19 +8502,19 @@
           <p:cNvPr id="16" name="">
             <a:extLst xmlns:a="http://schemas.openxmlformats.org/drawingml/2006/main">
               <a:ext uri="{FF2B5EF4-FFF2-40B4-BE49-F238E27FC236}">
-                <a16:creationId xmlns:a16="http://schemas.microsoft.com/office/drawing/2014/main" id="{6128617C-7A31-4B31-AB9D-9886BE430172}"/>
-              </a:ext>
-            </a:extLst>
-          </p:cNvPr>
-          <p:cNvSpPr>
-            <a:spLocks xmlns:a="http://schemas.openxmlformats.org/drawingml/2006/main" noGrp="1"/>
-          </p:cNvSpPr>
-          <p:nvPr/>
-        </p:nvSpPr>
-        <p:spPr>
-          <a:xfrm xmlns:a="http://schemas.openxmlformats.org/drawingml/2006/main">
-            <a:off x="1714500" y="2924175"/>
-            <a:ext cx="9429750" cy="609600"/>
+                <a16:creationId xmlns:a16="http://schemas.microsoft.com/office/drawing/2014/main" id="{4954ED78-76B9-4AD2-AC9E-B45BAD1B8133}"/>
+              </a:ext>
+            </a:extLst>
+          </p:cNvPr>
+          <p:cNvSpPr>
+            <a:spLocks xmlns:a="http://schemas.openxmlformats.org/drawingml/2006/main" noGrp="1"/>
+          </p:cNvSpPr>
+          <p:nvPr/>
+        </p:nvSpPr>
+        <p:spPr>
+          <a:xfrm xmlns:a="http://schemas.openxmlformats.org/drawingml/2006/main">
+            <a:off x="1714500" y="2990850"/>
+            <a:ext cx="9525000" cy="809625"/>
           </a:xfrm>
           <a:prstGeom xmlns:a="http://schemas.openxmlformats.org/drawingml/2006/main" prst="rect">
             <a:avLst/>
@@ -8527,7 +8531,7 @@
           <a:lstStyle xmlns:a="http://schemas.openxmlformats.org/drawingml/2006/main"/>
           <a:p xmlns:a="http://schemas.openxmlformats.org/drawingml/2006/main">
             <a:pPr algn="l">
-              <a:defRPr sz="1500" b="0">
+              <a:defRPr sz="1725" b="0">
                 <a:solidFill>
                   <a:srgbClr val="17253A"/>
                 </a:solidFill>
@@ -8537,7 +8541,7 @@
               </a:defRPr>
             </a:pPr>
             <a:r>
-              <a:rPr sz="1500" b="0">
+              <a:rPr sz="1725" b="0">
                 <a:solidFill>
                   <a:srgbClr val="17253A"/>
                 </a:solidFill>
@@ -8545,7 +8549,7 @@
                 <a:ea typeface="Arial"/>
                 <a:cs typeface="Arial"/>
               </a:rPr>
-              <a:t>Set up the method: Use the perpendicular height, not a sloping side, in the area formula.</a:t>
+              <a:t>Area = base × height ÷ 2</a:t>
             </a:r>
           </a:p>
         </p:txBody>
@@ -8555,28 +8559,30 @@
           <p:cNvPr id="17" name="">
             <a:extLst xmlns:a="http://schemas.openxmlformats.org/drawingml/2006/main">
               <a:ext uri="{FF2B5EF4-FFF2-40B4-BE49-F238E27FC236}">
-                <a16:creationId xmlns:a16="http://schemas.microsoft.com/office/drawing/2014/main" id="{87568943-14E7-4F41-89EE-52FAF74A715C}"/>
-              </a:ext>
-            </a:extLst>
-          </p:cNvPr>
-          <p:cNvSpPr>
-            <a:spLocks xmlns:a="http://schemas.openxmlformats.org/drawingml/2006/main" noGrp="1"/>
-          </p:cNvSpPr>
-          <p:nvPr/>
-        </p:nvSpPr>
-        <p:spPr>
-          <a:xfrm xmlns:a="http://schemas.openxmlformats.org/drawingml/2006/main">
-            <a:off x="1000125" y="3733800"/>
-            <a:ext cx="476250" cy="476250"/>
-          </a:xfrm>
-          <a:prstGeom xmlns:a="http://schemas.openxmlformats.org/drawingml/2006/main" prst="ellipse">
+                <a16:creationId xmlns:a16="http://schemas.microsoft.com/office/drawing/2014/main" id="{6D2AC375-FA48-461E-BE6F-41AED284A3CF}"/>
+              </a:ext>
+            </a:extLst>
+          </p:cNvPr>
+          <p:cNvSpPr>
+            <a:spLocks xmlns:a="http://schemas.openxmlformats.org/drawingml/2006/main" noGrp="1"/>
+          </p:cNvSpPr>
+          <p:nvPr/>
+        </p:nvSpPr>
+        <p:spPr>
+          <a:xfrm xmlns:a="http://schemas.openxmlformats.org/drawingml/2006/main">
+            <a:off x="1714500" y="3819525"/>
+            <a:ext cx="9334500" cy="9525"/>
+          </a:xfrm>
+          <a:prstGeom xmlns:a="http://schemas.openxmlformats.org/drawingml/2006/main" prst="rect">
             <a:avLst/>
           </a:prstGeom>
           <a:solidFill xmlns:a="http://schemas.openxmlformats.org/drawingml/2006/main">
-            <a:srgbClr val="2C6E73"/>
+            <a:srgbClr val="D9E0E6"/>
           </a:solidFill>
           <a:ln xmlns:a="http://schemas.openxmlformats.org/drawingml/2006/main" w="0">
-            <a:noFill/>
+            <a:solidFill>
+              <a:srgbClr val="D9E0E6"/>
+            </a:solidFill>
           </a:ln>
         </p:spPr>
       </p:sp>
@@ -8585,19 +8591,19 @@
           <p:cNvPr id="18" name="">
             <a:extLst xmlns:a="http://schemas.openxmlformats.org/drawingml/2006/main">
               <a:ext uri="{FF2B5EF4-FFF2-40B4-BE49-F238E27FC236}">
-                <a16:creationId xmlns:a16="http://schemas.microsoft.com/office/drawing/2014/main" id="{FDAFCEDC-45AE-4DB2-894A-C878AF169833}"/>
-              </a:ext>
-            </a:extLst>
-          </p:cNvPr>
-          <p:cNvSpPr>
-            <a:spLocks xmlns:a="http://schemas.openxmlformats.org/drawingml/2006/main" noGrp="1"/>
-          </p:cNvSpPr>
-          <p:nvPr/>
-        </p:nvSpPr>
-        <p:spPr>
-          <a:xfrm xmlns:a="http://schemas.openxmlformats.org/drawingml/2006/main">
-            <a:off x="1000125" y="3762375"/>
-            <a:ext cx="476250" cy="419100"/>
+                <a16:creationId xmlns:a16="http://schemas.microsoft.com/office/drawing/2014/main" id="{DA8B7FAA-FF31-46FC-BDD5-F9FE1A3172F0}"/>
+              </a:ext>
+            </a:extLst>
+          </p:cNvPr>
+          <p:cNvSpPr>
+            <a:spLocks xmlns:a="http://schemas.openxmlformats.org/drawingml/2006/main" noGrp="1"/>
+          </p:cNvSpPr>
+          <p:nvPr/>
+        </p:nvSpPr>
+        <p:spPr>
+          <a:xfrm xmlns:a="http://schemas.openxmlformats.org/drawingml/2006/main">
+            <a:off x="1162050" y="3952875"/>
+            <a:ext cx="400050" cy="400050"/>
           </a:xfrm>
           <a:prstGeom xmlns:a="http://schemas.openxmlformats.org/drawingml/2006/main" prst="rect">
             <a:avLst/>
@@ -8614,9 +8620,9 @@
           <a:lstStyle xmlns:a="http://schemas.openxmlformats.org/drawingml/2006/main"/>
           <a:p xmlns:a="http://schemas.openxmlformats.org/drawingml/2006/main">
             <a:pPr algn="ctr">
-              <a:defRPr sz="1350" b="1">
-                <a:solidFill>
-                  <a:srgbClr val="FFFFFF"/>
+              <a:defRPr sz="1125" b="1">
+                <a:solidFill>
+                  <a:srgbClr val="2C6E73"/>
                 </a:solidFill>
                 <a:latin typeface="Arial"/>
                 <a:ea typeface="Arial"/>
@@ -8624,9 +8630,9 @@
               </a:defRPr>
             </a:pPr>
             <a:r>
-              <a:rPr sz="1350" b="1">
-                <a:solidFill>
-                  <a:srgbClr val="FFFFFF"/>
+              <a:rPr sz="1125" b="1">
+                <a:solidFill>
+                  <a:srgbClr val="2C6E73"/>
                 </a:solidFill>
                 <a:latin typeface="Arial"/>
                 <a:ea typeface="Arial"/>
@@ -8642,19 +8648,19 @@
           <p:cNvPr id="19" name="">
             <a:extLst xmlns:a="http://schemas.openxmlformats.org/drawingml/2006/main">
               <a:ext uri="{FF2B5EF4-FFF2-40B4-BE49-F238E27FC236}">
-                <a16:creationId xmlns:a16="http://schemas.microsoft.com/office/drawing/2014/main" id="{D63FF747-DFAD-45AE-873B-FB8371A07654}"/>
-              </a:ext>
-            </a:extLst>
-          </p:cNvPr>
-          <p:cNvSpPr>
-            <a:spLocks xmlns:a="http://schemas.openxmlformats.org/drawingml/2006/main" noGrp="1"/>
-          </p:cNvSpPr>
-          <p:nvPr/>
-        </p:nvSpPr>
-        <p:spPr>
-          <a:xfrm xmlns:a="http://schemas.openxmlformats.org/drawingml/2006/main">
-            <a:off x="1714500" y="3667125"/>
-            <a:ext cx="9429750" cy="609600"/>
+                <a16:creationId xmlns:a16="http://schemas.microsoft.com/office/drawing/2014/main" id="{BF7EAD47-C22E-46AE-932A-9321036C90DF}"/>
+              </a:ext>
+            </a:extLst>
+          </p:cNvPr>
+          <p:cNvSpPr>
+            <a:spLocks xmlns:a="http://schemas.openxmlformats.org/drawingml/2006/main" noGrp="1"/>
+          </p:cNvSpPr>
+          <p:nvPr/>
+        </p:nvSpPr>
+        <p:spPr>
+          <a:xfrm xmlns:a="http://schemas.openxmlformats.org/drawingml/2006/main">
+            <a:off x="1714500" y="3867150"/>
+            <a:ext cx="9525000" cy="809625"/>
           </a:xfrm>
           <a:prstGeom xmlns:a="http://schemas.openxmlformats.org/drawingml/2006/main" prst="rect">
             <a:avLst/>
@@ -8671,7 +8677,7 @@
           <a:lstStyle xmlns:a="http://schemas.openxmlformats.org/drawingml/2006/main"/>
           <a:p xmlns:a="http://schemas.openxmlformats.org/drawingml/2006/main">
             <a:pPr algn="l">
-              <a:defRPr sz="1500" b="0">
+              <a:defRPr sz="1725" b="0">
                 <a:solidFill>
                   <a:srgbClr val="17253A"/>
                 </a:solidFill>
@@ -8681,7 +8687,7 @@
               </a:defRPr>
             </a:pPr>
             <a:r>
-              <a:rPr sz="1500" b="0">
+              <a:rPr sz="1725" b="0">
                 <a:solidFill>
                   <a:srgbClr val="17253A"/>
                 </a:solidFill>
@@ -8689,7 +8695,7 @@
                 <a:ea typeface="Arial"/>
                 <a:cs typeface="Arial"/>
               </a:rPr>
-              <a:t>Complete the calculation: 60 cm2.</a:t>
+              <a:t>15 × 8 ÷ 2</a:t>
             </a:r>
           </a:p>
         </p:txBody>
@@ -8699,28 +8705,30 @@
           <p:cNvPr id="20" name="">
             <a:extLst xmlns:a="http://schemas.openxmlformats.org/drawingml/2006/main">
               <a:ext uri="{FF2B5EF4-FFF2-40B4-BE49-F238E27FC236}">
-                <a16:creationId xmlns:a16="http://schemas.microsoft.com/office/drawing/2014/main" id="{64D19C77-65A3-4240-83CD-BBAFA93DC817}"/>
-              </a:ext>
-            </a:extLst>
-          </p:cNvPr>
-          <p:cNvSpPr>
-            <a:spLocks xmlns:a="http://schemas.openxmlformats.org/drawingml/2006/main" noGrp="1"/>
-          </p:cNvSpPr>
-          <p:nvPr/>
-        </p:nvSpPr>
-        <p:spPr>
-          <a:xfrm xmlns:a="http://schemas.openxmlformats.org/drawingml/2006/main">
-            <a:off x="1000125" y="4476750"/>
-            <a:ext cx="476250" cy="476250"/>
-          </a:xfrm>
-          <a:prstGeom xmlns:a="http://schemas.openxmlformats.org/drawingml/2006/main" prst="ellipse">
+                <a16:creationId xmlns:a16="http://schemas.microsoft.com/office/drawing/2014/main" id="{8B3BE865-D83B-485C-B8EE-3474EA1128B7}"/>
+              </a:ext>
+            </a:extLst>
+          </p:cNvPr>
+          <p:cNvSpPr>
+            <a:spLocks xmlns:a="http://schemas.openxmlformats.org/drawingml/2006/main" noGrp="1"/>
+          </p:cNvSpPr>
+          <p:nvPr/>
+        </p:nvSpPr>
+        <p:spPr>
+          <a:xfrm xmlns:a="http://schemas.openxmlformats.org/drawingml/2006/main">
+            <a:off x="1714500" y="4695825"/>
+            <a:ext cx="9334500" cy="9525"/>
+          </a:xfrm>
+          <a:prstGeom xmlns:a="http://schemas.openxmlformats.org/drawingml/2006/main" prst="rect">
             <a:avLst/>
           </a:prstGeom>
           <a:solidFill xmlns:a="http://schemas.openxmlformats.org/drawingml/2006/main">
-            <a:srgbClr val="2C6E73"/>
+            <a:srgbClr val="D9E0E6"/>
           </a:solidFill>
           <a:ln xmlns:a="http://schemas.openxmlformats.org/drawingml/2006/main" w="0">
-            <a:noFill/>
+            <a:solidFill>
+              <a:srgbClr val="D9E0E6"/>
+            </a:solidFill>
           </a:ln>
         </p:spPr>
       </p:sp>
@@ -8729,19 +8737,19 @@
           <p:cNvPr id="21" name="">
             <a:extLst xmlns:a="http://schemas.openxmlformats.org/drawingml/2006/main">
               <a:ext uri="{FF2B5EF4-FFF2-40B4-BE49-F238E27FC236}">
-                <a16:creationId xmlns:a16="http://schemas.microsoft.com/office/drawing/2014/main" id="{4A01F0E5-848E-4F33-A8C3-D669004479BA}"/>
-              </a:ext>
-            </a:extLst>
-          </p:cNvPr>
-          <p:cNvSpPr>
-            <a:spLocks xmlns:a="http://schemas.openxmlformats.org/drawingml/2006/main" noGrp="1"/>
-          </p:cNvSpPr>
-          <p:nvPr/>
-        </p:nvSpPr>
-        <p:spPr>
-          <a:xfrm xmlns:a="http://schemas.openxmlformats.org/drawingml/2006/main">
-            <a:off x="1000125" y="4505325"/>
-            <a:ext cx="476250" cy="419100"/>
+                <a16:creationId xmlns:a16="http://schemas.microsoft.com/office/drawing/2014/main" id="{51F063DC-9BD8-4CF2-AFD6-1F9B2A5F25EC}"/>
+              </a:ext>
+            </a:extLst>
+          </p:cNvPr>
+          <p:cNvSpPr>
+            <a:spLocks xmlns:a="http://schemas.openxmlformats.org/drawingml/2006/main" noGrp="1"/>
+          </p:cNvSpPr>
+          <p:nvPr/>
+        </p:nvSpPr>
+        <p:spPr>
+          <a:xfrm xmlns:a="http://schemas.openxmlformats.org/drawingml/2006/main">
+            <a:off x="1162050" y="4829175"/>
+            <a:ext cx="400050" cy="400050"/>
           </a:xfrm>
           <a:prstGeom xmlns:a="http://schemas.openxmlformats.org/drawingml/2006/main" prst="rect">
             <a:avLst/>
@@ -8758,9 +8766,9 @@
           <a:lstStyle xmlns:a="http://schemas.openxmlformats.org/drawingml/2006/main"/>
           <a:p xmlns:a="http://schemas.openxmlformats.org/drawingml/2006/main">
             <a:pPr algn="ctr">
-              <a:defRPr sz="1350" b="1">
-                <a:solidFill>
-                  <a:srgbClr val="FFFFFF"/>
+              <a:defRPr sz="1125" b="1">
+                <a:solidFill>
+                  <a:srgbClr val="2F785D"/>
                 </a:solidFill>
                 <a:latin typeface="Arial"/>
                 <a:ea typeface="Arial"/>
@@ -8768,9 +8776,9 @@
               </a:defRPr>
             </a:pPr>
             <a:r>
-              <a:rPr sz="1350" b="1">
-                <a:solidFill>
-                  <a:srgbClr val="FFFFFF"/>
+              <a:rPr sz="1125" b="1">
+                <a:solidFill>
+                  <a:srgbClr val="2F785D"/>
                 </a:solidFill>
                 <a:latin typeface="Arial"/>
                 <a:ea typeface="Arial"/>
@@ -8786,19 +8794,19 @@
           <p:cNvPr id="22" name="">
             <a:extLst xmlns:a="http://schemas.openxmlformats.org/drawingml/2006/main">
               <a:ext uri="{FF2B5EF4-FFF2-40B4-BE49-F238E27FC236}">
-                <a16:creationId xmlns:a16="http://schemas.microsoft.com/office/drawing/2014/main" id="{78FE9287-2EAA-4855-9225-D0B7D66B7FF5}"/>
-              </a:ext>
-            </a:extLst>
-          </p:cNvPr>
-          <p:cNvSpPr>
-            <a:spLocks xmlns:a="http://schemas.openxmlformats.org/drawingml/2006/main" noGrp="1"/>
-          </p:cNvSpPr>
-          <p:nvPr/>
-        </p:nvSpPr>
-        <p:spPr>
-          <a:xfrm xmlns:a="http://schemas.openxmlformats.org/drawingml/2006/main">
-            <a:off x="1714500" y="4410075"/>
-            <a:ext cx="9429750" cy="609600"/>
+                <a16:creationId xmlns:a16="http://schemas.microsoft.com/office/drawing/2014/main" id="{C09D1233-BB1D-425A-B1C2-2968320613E6}"/>
+              </a:ext>
+            </a:extLst>
+          </p:cNvPr>
+          <p:cNvSpPr>
+            <a:spLocks xmlns:a="http://schemas.openxmlformats.org/drawingml/2006/main" noGrp="1"/>
+          </p:cNvSpPr>
+          <p:nvPr/>
+        </p:nvSpPr>
+        <p:spPr>
+          <a:xfrm xmlns:a="http://schemas.openxmlformats.org/drawingml/2006/main">
+            <a:off x="1714500" y="4743450"/>
+            <a:ext cx="9525000" cy="809625"/>
           </a:xfrm>
           <a:prstGeom xmlns:a="http://schemas.openxmlformats.org/drawingml/2006/main" prst="rect">
             <a:avLst/>
@@ -8815,7 +8823,7 @@
           <a:lstStyle xmlns:a="http://schemas.openxmlformats.org/drawingml/2006/main"/>
           <a:p xmlns:a="http://schemas.openxmlformats.org/drawingml/2006/main">
             <a:pPr algn="l">
-              <a:defRPr sz="1500" b="1">
+              <a:defRPr sz="1725" b="1">
                 <a:solidFill>
                   <a:srgbClr val="2F785D"/>
                 </a:solidFill>
@@ -8825,7 +8833,7 @@
               </a:defRPr>
             </a:pPr>
             <a:r>
-              <a:rPr sz="1500" b="1">
+              <a:rPr sz="1725" b="1">
                 <a:solidFill>
                   <a:srgbClr val="2F785D"/>
                 </a:solidFill>
@@ -8833,7 +8841,7 @@
                 <a:ea typeface="Arial"/>
                 <a:cs typeface="Arial"/>
               </a:rPr>
-              <a:t>Check the result: Include squared units for area and check by decomposition.</a:t>
+              <a:t>120 ÷ 2 = 60 cm²</a:t>
             </a:r>
           </a:p>
         </p:txBody>
@@ -8841,7 +8849,7 @@
     </p:spTree>
     <p:extLst>
       <p:ext uri="{BB962C8B-B14F-4D97-AF65-F5344CB8AC3E}">
-        <p14:creationId xmlns:p14="http://schemas.microsoft.com/office/powerpoint/2010/main" val="1656494954"/>
+        <p14:creationId xmlns:p14="http://schemas.microsoft.com/office/powerpoint/2010/main" val="729663527"/>
       </p:ext>
     </p:extLst>
   </p:cSld>
@@ -9134,7 +9142,7 @@
           <p:cNvPr id="15" name="">
             <a:extLst xmlns:a="http://schemas.openxmlformats.org/drawingml/2006/main">
               <a:ext uri="{FF2B5EF4-FFF2-40B4-BE49-F238E27FC236}">
-                <a16:creationId xmlns:a16="http://schemas.microsoft.com/office/drawing/2014/main" id="{49F423A0-6C44-4D0E-8388-725F21556100}"/>
+                <a16:creationId xmlns:a16="http://schemas.microsoft.com/office/drawing/2014/main" id="{B9A1F1F4-77FA-4ABA-9D4D-4A6BC983AF29}"/>
               </a:ext>
             </a:extLst>
           </p:cNvPr>
@@ -9166,7 +9174,7 @@
           <p:cNvPr id="2" name="">
             <a:extLst xmlns:a="http://schemas.openxmlformats.org/drawingml/2006/main">
               <a:ext uri="{FF2B5EF4-FFF2-40B4-BE49-F238E27FC236}">
-                <a16:creationId xmlns:a16="http://schemas.microsoft.com/office/drawing/2014/main" id="{6CF9F34E-B602-4449-BAA3-0AB0125068CA}"/>
+                <a16:creationId xmlns:a16="http://schemas.microsoft.com/office/drawing/2014/main" id="{18339DCC-74D9-42D0-9BF6-6E500B113B4B}"/>
               </a:ext>
             </a:extLst>
           </p:cNvPr>
@@ -9223,7 +9231,7 @@
           <p:cNvPr id="3" name="">
             <a:extLst xmlns:a="http://schemas.openxmlformats.org/drawingml/2006/main">
               <a:ext uri="{FF2B5EF4-FFF2-40B4-BE49-F238E27FC236}">
-                <a16:creationId xmlns:a16="http://schemas.microsoft.com/office/drawing/2014/main" id="{FB1CE85B-FFF2-48B2-8D09-A857AF887D05}"/>
+                <a16:creationId xmlns:a16="http://schemas.microsoft.com/office/drawing/2014/main" id="{C100F31D-1E55-4625-9FBE-03160BD68198}"/>
               </a:ext>
             </a:extLst>
           </p:cNvPr>
@@ -9255,7 +9263,7 @@
           <p:cNvPr id="4" name="">
             <a:extLst xmlns:a="http://schemas.openxmlformats.org/drawingml/2006/main">
               <a:ext uri="{FF2B5EF4-FFF2-40B4-BE49-F238E27FC236}">
-                <a16:creationId xmlns:a16="http://schemas.microsoft.com/office/drawing/2014/main" id="{ED039400-BBCF-434D-B4B7-0578D84DF44A}"/>
+                <a16:creationId xmlns:a16="http://schemas.microsoft.com/office/drawing/2014/main" id="{83CF5B90-29A2-4F0B-8AD0-CAF70B684AB6}"/>
               </a:ext>
             </a:extLst>
           </p:cNvPr>
@@ -9312,7 +9320,7 @@
           <p:cNvPr id="5" name="">
             <a:extLst xmlns:a="http://schemas.openxmlformats.org/drawingml/2006/main">
               <a:ext uri="{FF2B5EF4-FFF2-40B4-BE49-F238E27FC236}">
-                <a16:creationId xmlns:a16="http://schemas.microsoft.com/office/drawing/2014/main" id="{EAEE8C77-5B8C-4F18-A896-62BAAA937B51}"/>
+                <a16:creationId xmlns:a16="http://schemas.microsoft.com/office/drawing/2014/main" id="{659127A6-EC2D-4E13-B2C4-C7C4329ECE35}"/>
               </a:ext>
             </a:extLst>
           </p:cNvPr>
@@ -9369,7 +9377,7 @@
           <p:cNvPr id="6" name="">
             <a:extLst xmlns:a="http://schemas.openxmlformats.org/drawingml/2006/main">
               <a:ext uri="{FF2B5EF4-FFF2-40B4-BE49-F238E27FC236}">
-                <a16:creationId xmlns:a16="http://schemas.microsoft.com/office/drawing/2014/main" id="{4BBA4AAE-5760-4B3A-80B0-A7FA23AAFC21}"/>
+                <a16:creationId xmlns:a16="http://schemas.microsoft.com/office/drawing/2014/main" id="{CF010331-A5CB-4909-A9A8-F643D6F8B265}"/>
               </a:ext>
             </a:extLst>
           </p:cNvPr>
@@ -9426,7 +9434,7 @@
           <p:cNvPr id="7" name="">
             <a:extLst xmlns:a="http://schemas.openxmlformats.org/drawingml/2006/main">
               <a:ext uri="{FF2B5EF4-FFF2-40B4-BE49-F238E27FC236}">
-                <a16:creationId xmlns:a16="http://schemas.microsoft.com/office/drawing/2014/main" id="{DD4CB6B5-69BC-4F48-A9A4-0A4E40498253}"/>
+                <a16:creationId xmlns:a16="http://schemas.microsoft.com/office/drawing/2014/main" id="{60A12EB0-4A20-4067-AFD6-21E9D09F598F}"/>
               </a:ext>
             </a:extLst>
           </p:cNvPr>
@@ -9458,7 +9466,7 @@
           <p:cNvPr id="8" name="">
             <a:extLst xmlns:a="http://schemas.openxmlformats.org/drawingml/2006/main">
               <a:ext uri="{FF2B5EF4-FFF2-40B4-BE49-F238E27FC236}">
-                <a16:creationId xmlns:a16="http://schemas.microsoft.com/office/drawing/2014/main" id="{63F41267-1CDC-48F5-A6E0-9A0D447F3EFF}"/>
+                <a16:creationId xmlns:a16="http://schemas.microsoft.com/office/drawing/2014/main" id="{1CF3F4ED-AC41-4A10-AA2B-5CB69FF0DC1C}"/>
               </a:ext>
             </a:extLst>
           </p:cNvPr>
@@ -9515,7 +9523,7 @@
           <p:cNvPr id="9" name="">
             <a:extLst xmlns:a="http://schemas.openxmlformats.org/drawingml/2006/main">
               <a:ext uri="{FF2B5EF4-FFF2-40B4-BE49-F238E27FC236}">
-                <a16:creationId xmlns:a16="http://schemas.microsoft.com/office/drawing/2014/main" id="{CB65AD4D-7F32-4352-B21D-C9AF37484262}"/>
+                <a16:creationId xmlns:a16="http://schemas.microsoft.com/office/drawing/2014/main" id="{2E03E161-A41F-4D78-84A4-BA4B0450FB0B}"/>
               </a:ext>
             </a:extLst>
           </p:cNvPr>
@@ -9572,7 +9580,7 @@
           <p:cNvPr id="10" name="">
             <a:extLst xmlns:a="http://schemas.openxmlformats.org/drawingml/2006/main">
               <a:ext uri="{FF2B5EF4-FFF2-40B4-BE49-F238E27FC236}">
-                <a16:creationId xmlns:a16="http://schemas.microsoft.com/office/drawing/2014/main" id="{EAB21F2A-4556-4A8F-95CC-232A1C5863B0}"/>
+                <a16:creationId xmlns:a16="http://schemas.microsoft.com/office/drawing/2014/main" id="{FE13EEC5-F8AB-49F8-9E47-78FDA06E2349}"/>
               </a:ext>
             </a:extLst>
           </p:cNvPr>
@@ -9629,7 +9637,7 @@
           <p:cNvPr id="11" name="">
             <a:extLst xmlns:a="http://schemas.openxmlformats.org/drawingml/2006/main">
               <a:ext uri="{FF2B5EF4-FFF2-40B4-BE49-F238E27FC236}">
-                <a16:creationId xmlns:a16="http://schemas.microsoft.com/office/drawing/2014/main" id="{A5359D2B-BB7A-417A-834C-F90BA903378C}"/>
+                <a16:creationId xmlns:a16="http://schemas.microsoft.com/office/drawing/2014/main" id="{923C1C21-E679-47AE-A8EF-41BD610F221F}"/>
               </a:ext>
             </a:extLst>
           </p:cNvPr>
@@ -9686,7 +9694,7 @@
           <p:cNvPr id="12" name="">
             <a:extLst xmlns:a="http://schemas.openxmlformats.org/drawingml/2006/main">
               <a:ext uri="{FF2B5EF4-FFF2-40B4-BE49-F238E27FC236}">
-                <a16:creationId xmlns:a16="http://schemas.microsoft.com/office/drawing/2014/main" id="{D5ECFE70-653C-4DF7-A6E7-E2078119C983}"/>
+                <a16:creationId xmlns:a16="http://schemas.microsoft.com/office/drawing/2014/main" id="{478E6B0F-317A-47A1-83AD-7AA050BF753A}"/>
               </a:ext>
             </a:extLst>
           </p:cNvPr>
@@ -9718,7 +9726,7 @@
           <p:cNvPr id="13" name="">
             <a:extLst xmlns:a="http://schemas.openxmlformats.org/drawingml/2006/main">
               <a:ext uri="{FF2B5EF4-FFF2-40B4-BE49-F238E27FC236}">
-                <a16:creationId xmlns:a16="http://schemas.microsoft.com/office/drawing/2014/main" id="{C3F44587-9583-4774-800E-EFC5627D947A}"/>
+                <a16:creationId xmlns:a16="http://schemas.microsoft.com/office/drawing/2014/main" id="{3FE92029-4430-4658-ACE8-F366EACE92C9}"/>
               </a:ext>
             </a:extLst>
           </p:cNvPr>
@@ -9775,7 +9783,7 @@
           <p:cNvPr id="14" name="">
             <a:extLst xmlns:a="http://schemas.openxmlformats.org/drawingml/2006/main">
               <a:ext uri="{FF2B5EF4-FFF2-40B4-BE49-F238E27FC236}">
-                <a16:creationId xmlns:a16="http://schemas.microsoft.com/office/drawing/2014/main" id="{8BD94BCC-3BFE-4A78-BC48-4A0BAA9E27DF}"/>
+                <a16:creationId xmlns:a16="http://schemas.microsoft.com/office/drawing/2014/main" id="{EDE80248-E881-4ABC-9CFA-B846B24DD4BF}"/>
               </a:ext>
             </a:extLst>
           </p:cNvPr>
@@ -9830,7 +9838,7 @@
     </p:spTree>
     <p:extLst>
       <p:ext uri="{BB962C8B-B14F-4D97-AF65-F5344CB8AC3E}">
-        <p14:creationId xmlns:p14="http://schemas.microsoft.com/office/powerpoint/2010/main" val="1109249610"/>
+        <p14:creationId xmlns:p14="http://schemas.microsoft.com/office/powerpoint/2010/main" val="193182303"/>
       </p:ext>
     </p:extLst>
   </p:cSld>
@@ -10031,7 +10039,7 @@
           <p:cNvPr id="16" name="">
             <a:extLst xmlns:a="http://schemas.openxmlformats.org/drawingml/2006/main">
               <a:ext uri="{FF2B5EF4-FFF2-40B4-BE49-F238E27FC236}">
-                <a16:creationId xmlns:a16="http://schemas.microsoft.com/office/drawing/2014/main" id="{52697D4A-9269-487A-A103-400B31F3637B}"/>
+                <a16:creationId xmlns:a16="http://schemas.microsoft.com/office/drawing/2014/main" id="{881C412A-4387-4578-935F-B4BC38BB41F2}"/>
               </a:ext>
             </a:extLst>
           </p:cNvPr>
@@ -10063,7 +10071,7 @@
           <p:cNvPr id="2" name="">
             <a:extLst xmlns:a="http://schemas.openxmlformats.org/drawingml/2006/main">
               <a:ext uri="{FF2B5EF4-FFF2-40B4-BE49-F238E27FC236}">
-                <a16:creationId xmlns:a16="http://schemas.microsoft.com/office/drawing/2014/main" id="{ED85D4B0-B210-4B34-B614-038DA4727784}"/>
+                <a16:creationId xmlns:a16="http://schemas.microsoft.com/office/drawing/2014/main" id="{AA66DE55-81BE-4928-94FC-0CA4C2A64156}"/>
               </a:ext>
             </a:extLst>
           </p:cNvPr>
@@ -10120,7 +10128,7 @@
           <p:cNvPr id="3" name="">
             <a:extLst xmlns:a="http://schemas.openxmlformats.org/drawingml/2006/main">
               <a:ext uri="{FF2B5EF4-FFF2-40B4-BE49-F238E27FC236}">
-                <a16:creationId xmlns:a16="http://schemas.microsoft.com/office/drawing/2014/main" id="{B8C97408-1E58-4E81-95ED-ED5854021AAA}"/>
+                <a16:creationId xmlns:a16="http://schemas.microsoft.com/office/drawing/2014/main" id="{540FED28-279A-418F-8342-F4298C5C2096}"/>
               </a:ext>
             </a:extLst>
           </p:cNvPr>
@@ -10152,7 +10160,7 @@
           <p:cNvPr id="4" name="">
             <a:extLst xmlns:a="http://schemas.openxmlformats.org/drawingml/2006/main">
               <a:ext uri="{FF2B5EF4-FFF2-40B4-BE49-F238E27FC236}">
-                <a16:creationId xmlns:a16="http://schemas.microsoft.com/office/drawing/2014/main" id="{185CF085-7FE1-4E5D-A927-2753F6EFB55D}"/>
+                <a16:creationId xmlns:a16="http://schemas.microsoft.com/office/drawing/2014/main" id="{C6EB0A5F-EABD-4C8E-A721-32C1DE80607B}"/>
               </a:ext>
             </a:extLst>
           </p:cNvPr>
@@ -10209,7 +10217,7 @@
           <p:cNvPr id="5" name="">
             <a:extLst xmlns:a="http://schemas.openxmlformats.org/drawingml/2006/main">
               <a:ext uri="{FF2B5EF4-FFF2-40B4-BE49-F238E27FC236}">
-                <a16:creationId xmlns:a16="http://schemas.microsoft.com/office/drawing/2014/main" id="{8B498398-E7B0-4A73-9F87-7F40FF2D1D3D}"/>
+                <a16:creationId xmlns:a16="http://schemas.microsoft.com/office/drawing/2014/main" id="{DD3D17EE-F4CB-4F3D-BB95-8A9F422C277D}"/>
               </a:ext>
             </a:extLst>
           </p:cNvPr>
@@ -10266,7 +10274,7 @@
           <p:cNvPr id="6" name="">
             <a:extLst xmlns:a="http://schemas.openxmlformats.org/drawingml/2006/main">
               <a:ext uri="{FF2B5EF4-FFF2-40B4-BE49-F238E27FC236}">
-                <a16:creationId xmlns:a16="http://schemas.microsoft.com/office/drawing/2014/main" id="{BB918E50-2DFE-4160-9276-F032657D19C4}"/>
+                <a16:creationId xmlns:a16="http://schemas.microsoft.com/office/drawing/2014/main" id="{27733CBE-F327-43B9-AF8A-0DE4E2F3B6F4}"/>
               </a:ext>
             </a:extLst>
           </p:cNvPr>
@@ -10323,7 +10331,7 @@
           <p:cNvPr id="7" name="">
             <a:extLst xmlns:a="http://schemas.openxmlformats.org/drawingml/2006/main">
               <a:ext uri="{FF2B5EF4-FFF2-40B4-BE49-F238E27FC236}">
-                <a16:creationId xmlns:a16="http://schemas.microsoft.com/office/drawing/2014/main" id="{BE7958DE-D4DA-444A-9606-C4F91F0EFAE2}"/>
+                <a16:creationId xmlns:a16="http://schemas.microsoft.com/office/drawing/2014/main" id="{CEB711EE-66BE-4185-8E2F-40000022DF51}"/>
               </a:ext>
             </a:extLst>
           </p:cNvPr>
@@ -10355,7 +10363,7 @@
           <p:cNvPr id="8" name="">
             <a:extLst xmlns:a="http://schemas.openxmlformats.org/drawingml/2006/main">
               <a:ext uri="{FF2B5EF4-FFF2-40B4-BE49-F238E27FC236}">
-                <a16:creationId xmlns:a16="http://schemas.microsoft.com/office/drawing/2014/main" id="{49650C4D-36A2-4A54-AA78-A596C4E93633}"/>
+                <a16:creationId xmlns:a16="http://schemas.microsoft.com/office/drawing/2014/main" id="{E830535E-33BA-4BF9-A015-195B38B7E7D0}"/>
               </a:ext>
             </a:extLst>
           </p:cNvPr>
@@ -10412,7 +10420,7 @@
           <p:cNvPr id="9" name="">
             <a:extLst xmlns:a="http://schemas.openxmlformats.org/drawingml/2006/main">
               <a:ext uri="{FF2B5EF4-FFF2-40B4-BE49-F238E27FC236}">
-                <a16:creationId xmlns:a16="http://schemas.microsoft.com/office/drawing/2014/main" id="{8DC8ACA6-028D-4CB9-9797-52903A182FA6}"/>
+                <a16:creationId xmlns:a16="http://schemas.microsoft.com/office/drawing/2014/main" id="{B693EA39-6925-47DF-A4FB-8398F6ABD907}"/>
               </a:ext>
             </a:extLst>
           </p:cNvPr>
@@ -10469,7 +10477,7 @@
           <p:cNvPr id="10" name="">
             <a:extLst xmlns:a="http://schemas.openxmlformats.org/drawingml/2006/main">
               <a:ext uri="{FF2B5EF4-FFF2-40B4-BE49-F238E27FC236}">
-                <a16:creationId xmlns:a16="http://schemas.microsoft.com/office/drawing/2014/main" id="{69902A0F-750A-4204-8A73-27EDDCD72061}"/>
+                <a16:creationId xmlns:a16="http://schemas.microsoft.com/office/drawing/2014/main" id="{DEDC0690-C6E6-4332-88C9-E69B6674B7BA}"/>
               </a:ext>
             </a:extLst>
           </p:cNvPr>
@@ -10526,7 +10534,7 @@
           <p:cNvPr id="11" name="">
             <a:extLst xmlns:a="http://schemas.openxmlformats.org/drawingml/2006/main">
               <a:ext uri="{FF2B5EF4-FFF2-40B4-BE49-F238E27FC236}">
-                <a16:creationId xmlns:a16="http://schemas.microsoft.com/office/drawing/2014/main" id="{E6F7E60B-5D4B-4345-9630-362CE859ABEF}"/>
+                <a16:creationId xmlns:a16="http://schemas.microsoft.com/office/drawing/2014/main" id="{C9F5D112-5D39-4628-8C3D-3C3E7513E3C7}"/>
               </a:ext>
             </a:extLst>
           </p:cNvPr>
@@ -10583,7 +10591,7 @@
           <p:cNvPr id="12" name="">
             <a:extLst xmlns:a="http://schemas.openxmlformats.org/drawingml/2006/main">
               <a:ext uri="{FF2B5EF4-FFF2-40B4-BE49-F238E27FC236}">
-                <a16:creationId xmlns:a16="http://schemas.microsoft.com/office/drawing/2014/main" id="{E1D637CE-51DD-4D37-8B33-6A3BC2A93599}"/>
+                <a16:creationId xmlns:a16="http://schemas.microsoft.com/office/drawing/2014/main" id="{3B5B7EF7-D41A-4890-B0CF-DC54F7AA5A0E}"/>
               </a:ext>
             </a:extLst>
           </p:cNvPr>
@@ -10640,7 +10648,7 @@
           <p:cNvPr id="13" name="">
             <a:extLst xmlns:a="http://schemas.openxmlformats.org/drawingml/2006/main">
               <a:ext uri="{FF2B5EF4-FFF2-40B4-BE49-F238E27FC236}">
-                <a16:creationId xmlns:a16="http://schemas.microsoft.com/office/drawing/2014/main" id="{0C72B73E-B40C-4CF6-ADA7-74BE4DF7851F}"/>
+                <a16:creationId xmlns:a16="http://schemas.microsoft.com/office/drawing/2014/main" id="{EA837699-50EB-442F-80C4-6436D2E7BFAA}"/>
               </a:ext>
             </a:extLst>
           </p:cNvPr>
@@ -10697,7 +10705,7 @@
           <p:cNvPr id="14" name="">
             <a:extLst xmlns:a="http://schemas.openxmlformats.org/drawingml/2006/main">
               <a:ext uri="{FF2B5EF4-FFF2-40B4-BE49-F238E27FC236}">
-                <a16:creationId xmlns:a16="http://schemas.microsoft.com/office/drawing/2014/main" id="{36F67336-8129-41FC-A1C8-B3CCEBE6A58E}"/>
+                <a16:creationId xmlns:a16="http://schemas.microsoft.com/office/drawing/2014/main" id="{EB831A7F-CFFB-40AF-A565-2B390BC89B4A}"/>
               </a:ext>
             </a:extLst>
           </p:cNvPr>
@@ -10754,7 +10762,7 @@
           <p:cNvPr id="15" name="">
             <a:extLst xmlns:a="http://schemas.openxmlformats.org/drawingml/2006/main">
               <a:ext uri="{FF2B5EF4-FFF2-40B4-BE49-F238E27FC236}">
-                <a16:creationId xmlns:a16="http://schemas.microsoft.com/office/drawing/2014/main" id="{DCFFBDCC-6A35-474B-8633-EC81055E0EA9}"/>
+                <a16:creationId xmlns:a16="http://schemas.microsoft.com/office/drawing/2014/main" id="{BF4819B3-7272-4165-959E-D992AA9A958A}"/>
               </a:ext>
             </a:extLst>
           </p:cNvPr>
@@ -10809,7 +10817,7 @@
     </p:spTree>
     <p:extLst>
       <p:ext uri="{BB962C8B-B14F-4D97-AF65-F5344CB8AC3E}">
-        <p14:creationId xmlns:p14="http://schemas.microsoft.com/office/powerpoint/2010/main" val="570400258"/>
+        <p14:creationId xmlns:p14="http://schemas.microsoft.com/office/powerpoint/2010/main" val="2039917233"/>
       </p:ext>
     </p:extLst>
   </p:cSld>
@@ -10964,7 +10972,7 @@
           <p:cNvPr id="16" name="">
             <a:extLst xmlns:a="http://schemas.openxmlformats.org/drawingml/2006/main">
               <a:ext uri="{FF2B5EF4-FFF2-40B4-BE49-F238E27FC236}">
-                <a16:creationId xmlns:a16="http://schemas.microsoft.com/office/drawing/2014/main" id="{385D3D1F-74B4-427B-8456-A8099053EA8D}"/>
+                <a16:creationId xmlns:a16="http://schemas.microsoft.com/office/drawing/2014/main" id="{05EAFBEB-5FAB-4B4E-B333-2538D1E5163D}"/>
               </a:ext>
             </a:extLst>
           </p:cNvPr>
@@ -10996,7 +11004,7 @@
           <p:cNvPr id="2" name="">
             <a:extLst xmlns:a="http://schemas.openxmlformats.org/drawingml/2006/main">
               <a:ext uri="{FF2B5EF4-FFF2-40B4-BE49-F238E27FC236}">
-                <a16:creationId xmlns:a16="http://schemas.microsoft.com/office/drawing/2014/main" id="{CFF328A2-1DD6-4437-AA80-839940C04D45}"/>
+                <a16:creationId xmlns:a16="http://schemas.microsoft.com/office/drawing/2014/main" id="{6482F6C9-FEC5-4880-B5B8-85A4633A0EF1}"/>
               </a:ext>
             </a:extLst>
           </p:cNvPr>
@@ -11053,7 +11061,7 @@
           <p:cNvPr id="3" name="">
             <a:extLst xmlns:a="http://schemas.openxmlformats.org/drawingml/2006/main">
               <a:ext uri="{FF2B5EF4-FFF2-40B4-BE49-F238E27FC236}">
-                <a16:creationId xmlns:a16="http://schemas.microsoft.com/office/drawing/2014/main" id="{5124CA16-6101-401B-89D4-8982CB35399A}"/>
+                <a16:creationId xmlns:a16="http://schemas.microsoft.com/office/drawing/2014/main" id="{6B04C3A1-3982-4710-B6CD-7748EB09B542}"/>
               </a:ext>
             </a:extLst>
           </p:cNvPr>
@@ -11085,7 +11093,7 @@
           <p:cNvPr id="4" name="">
             <a:extLst xmlns:a="http://schemas.openxmlformats.org/drawingml/2006/main">
               <a:ext uri="{FF2B5EF4-FFF2-40B4-BE49-F238E27FC236}">
-                <a16:creationId xmlns:a16="http://schemas.microsoft.com/office/drawing/2014/main" id="{31493455-042E-46D1-A378-B74949749DFF}"/>
+                <a16:creationId xmlns:a16="http://schemas.microsoft.com/office/drawing/2014/main" id="{5158E299-34ED-4EDC-9252-89DCCC1DF829}"/>
               </a:ext>
             </a:extLst>
           </p:cNvPr>
@@ -11142,7 +11150,7 @@
           <p:cNvPr id="5" name="">
             <a:extLst xmlns:a="http://schemas.openxmlformats.org/drawingml/2006/main">
               <a:ext uri="{FF2B5EF4-FFF2-40B4-BE49-F238E27FC236}">
-                <a16:creationId xmlns:a16="http://schemas.microsoft.com/office/drawing/2014/main" id="{9B224E38-64CF-4627-B47F-609EFEDBDF0B}"/>
+                <a16:creationId xmlns:a16="http://schemas.microsoft.com/office/drawing/2014/main" id="{3ABF8CAB-5574-486F-8716-6E393EB61B08}"/>
               </a:ext>
             </a:extLst>
           </p:cNvPr>
@@ -11199,7 +11207,7 @@
           <p:cNvPr id="6" name="">
             <a:extLst xmlns:a="http://schemas.openxmlformats.org/drawingml/2006/main">
               <a:ext uri="{FF2B5EF4-FFF2-40B4-BE49-F238E27FC236}">
-                <a16:creationId xmlns:a16="http://schemas.microsoft.com/office/drawing/2014/main" id="{874AB327-A279-49C6-9451-D523848F72B3}"/>
+                <a16:creationId xmlns:a16="http://schemas.microsoft.com/office/drawing/2014/main" id="{359E0813-E1F2-4363-A95F-41579808932D}"/>
               </a:ext>
             </a:extLst>
           </p:cNvPr>
@@ -11256,7 +11264,7 @@
           <p:cNvPr id="7" name="">
             <a:extLst xmlns:a="http://schemas.openxmlformats.org/drawingml/2006/main">
               <a:ext uri="{FF2B5EF4-FFF2-40B4-BE49-F238E27FC236}">
-                <a16:creationId xmlns:a16="http://schemas.microsoft.com/office/drawing/2014/main" id="{F917F1C0-ED99-4E57-A239-88454865907A}"/>
+                <a16:creationId xmlns:a16="http://schemas.microsoft.com/office/drawing/2014/main" id="{55DC319D-52AB-4D45-9DA5-CE97E16DF086}"/>
               </a:ext>
             </a:extLst>
           </p:cNvPr>
@@ -11288,7 +11296,7 @@
           <p:cNvPr id="8" name="">
             <a:extLst xmlns:a="http://schemas.openxmlformats.org/drawingml/2006/main">
               <a:ext uri="{FF2B5EF4-FFF2-40B4-BE49-F238E27FC236}">
-                <a16:creationId xmlns:a16="http://schemas.microsoft.com/office/drawing/2014/main" id="{0A363138-EBB6-4AA1-8342-0B38502988E2}"/>
+                <a16:creationId xmlns:a16="http://schemas.microsoft.com/office/drawing/2014/main" id="{3EFC0BCD-137B-4B1A-A71F-35A70137845E}"/>
               </a:ext>
             </a:extLst>
           </p:cNvPr>
@@ -11345,7 +11353,7 @@
           <p:cNvPr id="9" name="">
             <a:extLst xmlns:a="http://schemas.openxmlformats.org/drawingml/2006/main">
               <a:ext uri="{FF2B5EF4-FFF2-40B4-BE49-F238E27FC236}">
-                <a16:creationId xmlns:a16="http://schemas.microsoft.com/office/drawing/2014/main" id="{DF7C3A31-76B9-4331-8ED3-B2C8580BEBDF}"/>
+                <a16:creationId xmlns:a16="http://schemas.microsoft.com/office/drawing/2014/main" id="{FE1D4143-2AF0-4BC5-8D2B-A9B06655354F}"/>
               </a:ext>
             </a:extLst>
           </p:cNvPr>
@@ -11406,7 +11414,7 @@
           <p:nvPr/>
         </p:nvPicPr>
         <p:blipFill>
-          <a:blip xmlns:r="http://schemas.openxmlformats.org/officeDocument/2006/relationships" xmlns:a="http://schemas.openxmlformats.org/drawingml/2006/main" r:embed="Rb11970135d114556"/>
+          <a:blip xmlns:r="http://schemas.openxmlformats.org/officeDocument/2006/relationships" xmlns:a="http://schemas.openxmlformats.org/drawingml/2006/main" r:embed="Rde2297fcb0b54fe1"/>
           <a:stretch xmlns:a="http://schemas.openxmlformats.org/drawingml/2006/main"/>
         </p:blipFill>
         <p:spPr>
@@ -11424,7 +11432,7 @@
           <p:cNvPr id="11" name="">
             <a:extLst xmlns:a="http://schemas.openxmlformats.org/drawingml/2006/main">
               <a:ext uri="{FF2B5EF4-FFF2-40B4-BE49-F238E27FC236}">
-                <a16:creationId xmlns:a16="http://schemas.microsoft.com/office/drawing/2014/main" id="{22AEC8F5-0441-4D33-BC91-8D52FE850D70}"/>
+                <a16:creationId xmlns:a16="http://schemas.microsoft.com/office/drawing/2014/main" id="{E02D0B56-CB5E-4893-98FD-603D24543826}"/>
               </a:ext>
             </a:extLst>
           </p:cNvPr>
@@ -11481,7 +11489,7 @@
           <p:cNvPr id="12" name="">
             <a:extLst xmlns:a="http://schemas.openxmlformats.org/drawingml/2006/main">
               <a:ext uri="{FF2B5EF4-FFF2-40B4-BE49-F238E27FC236}">
-                <a16:creationId xmlns:a16="http://schemas.microsoft.com/office/drawing/2014/main" id="{AD89D0E9-2A8C-4932-8470-39A2BA2ECC72}"/>
+                <a16:creationId xmlns:a16="http://schemas.microsoft.com/office/drawing/2014/main" id="{E5319B22-6A3D-45EF-8023-C2978DD1E53B}"/>
               </a:ext>
             </a:extLst>
           </p:cNvPr>
@@ -11538,7 +11546,7 @@
           <p:cNvPr id="13" name="">
             <a:extLst xmlns:a="http://schemas.openxmlformats.org/drawingml/2006/main">
               <a:ext uri="{FF2B5EF4-FFF2-40B4-BE49-F238E27FC236}">
-                <a16:creationId xmlns:a16="http://schemas.microsoft.com/office/drawing/2014/main" id="{2BFD3236-3AA1-4867-9DBD-DB0A4C638F31}"/>
+                <a16:creationId xmlns:a16="http://schemas.microsoft.com/office/drawing/2014/main" id="{EBD8FD63-FDF7-4E6D-9ED6-3F58C67EABB6}"/>
               </a:ext>
             </a:extLst>
           </p:cNvPr>
@@ -11570,7 +11578,7 @@
           <p:cNvPr id="14" name="">
             <a:extLst xmlns:a="http://schemas.openxmlformats.org/drawingml/2006/main">
               <a:ext uri="{FF2B5EF4-FFF2-40B4-BE49-F238E27FC236}">
-                <a16:creationId xmlns:a16="http://schemas.microsoft.com/office/drawing/2014/main" id="{5BFE3C5A-0888-4C12-8B8B-69F39F452299}"/>
+                <a16:creationId xmlns:a16="http://schemas.microsoft.com/office/drawing/2014/main" id="{AF20555B-478D-4E27-9966-6E357B871343}"/>
               </a:ext>
             </a:extLst>
           </p:cNvPr>
@@ -11627,7 +11635,7 @@
           <p:cNvPr id="15" name="">
             <a:extLst xmlns:a="http://schemas.openxmlformats.org/drawingml/2006/main">
               <a:ext uri="{FF2B5EF4-FFF2-40B4-BE49-F238E27FC236}">
-                <a16:creationId xmlns:a16="http://schemas.microsoft.com/office/drawing/2014/main" id="{20487DD7-F5C4-4B9F-ABD9-45525EBE6974}"/>
+                <a16:creationId xmlns:a16="http://schemas.microsoft.com/office/drawing/2014/main" id="{BCC333F2-90B7-470F-B3F1-473BDE8DE919}"/>
               </a:ext>
             </a:extLst>
           </p:cNvPr>
@@ -11682,7 +11690,7 @@
     </p:spTree>
     <p:extLst>
       <p:ext uri="{BB962C8B-B14F-4D97-AF65-F5344CB8AC3E}">
-        <p14:creationId xmlns:p14="http://schemas.microsoft.com/office/powerpoint/2010/main" val="1692457741"/>
+        <p14:creationId xmlns:p14="http://schemas.microsoft.com/office/powerpoint/2010/main" val="787051961"/>
       </p:ext>
     </p:extLst>
   </p:cSld>
@@ -11837,7 +11845,7 @@
           <p:cNvPr id="23" name="">
             <a:extLst xmlns:a="http://schemas.openxmlformats.org/drawingml/2006/main">
               <a:ext uri="{FF2B5EF4-FFF2-40B4-BE49-F238E27FC236}">
-                <a16:creationId xmlns:a16="http://schemas.microsoft.com/office/drawing/2014/main" id="{29C27477-330C-45ED-9408-9D6A525F2670}"/>
+                <a16:creationId xmlns:a16="http://schemas.microsoft.com/office/drawing/2014/main" id="{D6B737E1-3719-434A-9169-8BAE4F6841DA}"/>
               </a:ext>
             </a:extLst>
           </p:cNvPr>
@@ -11869,7 +11877,7 @@
           <p:cNvPr id="2" name="">
             <a:extLst xmlns:a="http://schemas.openxmlformats.org/drawingml/2006/main">
               <a:ext uri="{FF2B5EF4-FFF2-40B4-BE49-F238E27FC236}">
-                <a16:creationId xmlns:a16="http://schemas.microsoft.com/office/drawing/2014/main" id="{0C19F9E4-65AF-43D6-BF32-BA0F35126653}"/>
+                <a16:creationId xmlns:a16="http://schemas.microsoft.com/office/drawing/2014/main" id="{E3D351C0-FD03-4182-9856-471A9EE7784C}"/>
               </a:ext>
             </a:extLst>
           </p:cNvPr>
@@ -11926,7 +11934,7 @@
           <p:cNvPr id="3" name="">
             <a:extLst xmlns:a="http://schemas.openxmlformats.org/drawingml/2006/main">
               <a:ext uri="{FF2B5EF4-FFF2-40B4-BE49-F238E27FC236}">
-                <a16:creationId xmlns:a16="http://schemas.microsoft.com/office/drawing/2014/main" id="{9CA7AE31-04A0-4BF1-861D-176AB56E8066}"/>
+                <a16:creationId xmlns:a16="http://schemas.microsoft.com/office/drawing/2014/main" id="{30E37F95-3902-4CAA-A995-D69A7D364960}"/>
               </a:ext>
             </a:extLst>
           </p:cNvPr>
@@ -11958,7 +11966,7 @@
           <p:cNvPr id="4" name="">
             <a:extLst xmlns:a="http://schemas.openxmlformats.org/drawingml/2006/main">
               <a:ext uri="{FF2B5EF4-FFF2-40B4-BE49-F238E27FC236}">
-                <a16:creationId xmlns:a16="http://schemas.microsoft.com/office/drawing/2014/main" id="{D0633A49-E33F-4D3C-9E71-420D51DB1C0E}"/>
+                <a16:creationId xmlns:a16="http://schemas.microsoft.com/office/drawing/2014/main" id="{F8DB8565-C424-405C-A80D-1EC4EDBAC4AB}"/>
               </a:ext>
             </a:extLst>
           </p:cNvPr>
@@ -12015,7 +12023,7 @@
           <p:cNvPr id="5" name="">
             <a:extLst xmlns:a="http://schemas.openxmlformats.org/drawingml/2006/main">
               <a:ext uri="{FF2B5EF4-FFF2-40B4-BE49-F238E27FC236}">
-                <a16:creationId xmlns:a16="http://schemas.microsoft.com/office/drawing/2014/main" id="{375D6A53-2B61-44E8-BF6A-7F826B17C2D2}"/>
+                <a16:creationId xmlns:a16="http://schemas.microsoft.com/office/drawing/2014/main" id="{8D3D7C60-6F11-4679-AB50-3D98C30C88AA}"/>
               </a:ext>
             </a:extLst>
           </p:cNvPr>
@@ -12072,7 +12080,7 @@
           <p:cNvPr id="6" name="">
             <a:extLst xmlns:a="http://schemas.openxmlformats.org/drawingml/2006/main">
               <a:ext uri="{FF2B5EF4-FFF2-40B4-BE49-F238E27FC236}">
-                <a16:creationId xmlns:a16="http://schemas.microsoft.com/office/drawing/2014/main" id="{1A5D6681-791C-463C-B5E8-23241FEA766C}"/>
+                <a16:creationId xmlns:a16="http://schemas.microsoft.com/office/drawing/2014/main" id="{154BA556-5EB0-4880-A964-382229ED1BCA}"/>
               </a:ext>
             </a:extLst>
           </p:cNvPr>
@@ -12129,7 +12137,7 @@
           <p:cNvPr id="7" name="">
             <a:extLst xmlns:a="http://schemas.openxmlformats.org/drawingml/2006/main">
               <a:ext uri="{FF2B5EF4-FFF2-40B4-BE49-F238E27FC236}">
-                <a16:creationId xmlns:a16="http://schemas.microsoft.com/office/drawing/2014/main" id="{7F8A0DF0-FB9B-4EA5-9A50-729851D7D3E1}"/>
+                <a16:creationId xmlns:a16="http://schemas.microsoft.com/office/drawing/2014/main" id="{3410691D-E6A1-4EA4-9A6C-334843C4CCF3}"/>
               </a:ext>
             </a:extLst>
           </p:cNvPr>
@@ -12161,7 +12169,7 @@
           <p:cNvPr id="8" name="">
             <a:extLst xmlns:a="http://schemas.openxmlformats.org/drawingml/2006/main">
               <a:ext uri="{FF2B5EF4-FFF2-40B4-BE49-F238E27FC236}">
-                <a16:creationId xmlns:a16="http://schemas.microsoft.com/office/drawing/2014/main" id="{D60EE310-C15E-46EA-A0A3-451E82B33E93}"/>
+                <a16:creationId xmlns:a16="http://schemas.microsoft.com/office/drawing/2014/main" id="{0C9BCD8D-69A5-4F17-8A50-029B5F7A758C}"/>
               </a:ext>
             </a:extLst>
           </p:cNvPr>
@@ -12218,7 +12226,7 @@
           <p:cNvPr id="9" name="">
             <a:extLst xmlns:a="http://schemas.openxmlformats.org/drawingml/2006/main">
               <a:ext uri="{FF2B5EF4-FFF2-40B4-BE49-F238E27FC236}">
-                <a16:creationId xmlns:a16="http://schemas.microsoft.com/office/drawing/2014/main" id="{C5FF3EF5-0E37-48A5-82EC-B44070295A15}"/>
+                <a16:creationId xmlns:a16="http://schemas.microsoft.com/office/drawing/2014/main" id="{30B6D1E8-D12F-4DB0-8214-084E03009058}"/>
               </a:ext>
             </a:extLst>
           </p:cNvPr>
@@ -12275,7 +12283,7 @@
           <p:cNvPr id="10" name="">
             <a:extLst xmlns:a="http://schemas.openxmlformats.org/drawingml/2006/main">
               <a:ext uri="{FF2B5EF4-FFF2-40B4-BE49-F238E27FC236}">
-                <a16:creationId xmlns:a16="http://schemas.microsoft.com/office/drawing/2014/main" id="{7A6E76D3-9016-450E-8B14-F0F83A5E3733}"/>
+                <a16:creationId xmlns:a16="http://schemas.microsoft.com/office/drawing/2014/main" id="{517304CE-9285-42C9-BDBC-E0FB0E079E79}"/>
               </a:ext>
             </a:extLst>
           </p:cNvPr>
@@ -12309,7 +12317,7 @@
           <p:cNvPr id="11" name="">
             <a:extLst xmlns:a="http://schemas.openxmlformats.org/drawingml/2006/main">
               <a:ext uri="{FF2B5EF4-FFF2-40B4-BE49-F238E27FC236}">
-                <a16:creationId xmlns:a16="http://schemas.microsoft.com/office/drawing/2014/main" id="{906A1A29-0677-47DE-942E-B3F99E3F0ADD}"/>
+                <a16:creationId xmlns:a16="http://schemas.microsoft.com/office/drawing/2014/main" id="{AAABAD69-62AF-4170-93F6-DE9647569575}"/>
               </a:ext>
             </a:extLst>
           </p:cNvPr>
@@ -12341,7 +12349,7 @@
           <p:cNvPr id="12" name="">
             <a:extLst xmlns:a="http://schemas.openxmlformats.org/drawingml/2006/main">
               <a:ext uri="{FF2B5EF4-FFF2-40B4-BE49-F238E27FC236}">
-                <a16:creationId xmlns:a16="http://schemas.microsoft.com/office/drawing/2014/main" id="{7A7B1FCA-8706-4E55-A7CE-0CE1797FBBFF}"/>
+                <a16:creationId xmlns:a16="http://schemas.microsoft.com/office/drawing/2014/main" id="{05C867CE-11A0-4AFF-A1EA-360EDF1B09BA}"/>
               </a:ext>
             </a:extLst>
           </p:cNvPr>
@@ -12398,7 +12406,7 @@
           <p:cNvPr id="13" name="">
             <a:extLst xmlns:a="http://schemas.openxmlformats.org/drawingml/2006/main">
               <a:ext uri="{FF2B5EF4-FFF2-40B4-BE49-F238E27FC236}">
-                <a16:creationId xmlns:a16="http://schemas.microsoft.com/office/drawing/2014/main" id="{1749F8A0-81C6-4CDA-98D2-F7F3A0141932}"/>
+                <a16:creationId xmlns:a16="http://schemas.microsoft.com/office/drawing/2014/main" id="{4F0FB075-5950-4792-A1B0-DBC41D68E432}"/>
               </a:ext>
             </a:extLst>
           </p:cNvPr>
@@ -12455,7 +12463,7 @@
           <p:cNvPr id="14" name="">
             <a:extLst xmlns:a="http://schemas.openxmlformats.org/drawingml/2006/main">
               <a:ext uri="{FF2B5EF4-FFF2-40B4-BE49-F238E27FC236}">
-                <a16:creationId xmlns:a16="http://schemas.microsoft.com/office/drawing/2014/main" id="{B53BA297-1F72-4DC3-9146-FAFA6D68183E}"/>
+                <a16:creationId xmlns:a16="http://schemas.microsoft.com/office/drawing/2014/main" id="{CF1CEB4B-517F-4FBA-A94F-9C8B7B438654}"/>
               </a:ext>
             </a:extLst>
           </p:cNvPr>
@@ -12489,7 +12497,7 @@
           <p:cNvPr id="15" name="">
             <a:extLst xmlns:a="http://schemas.openxmlformats.org/drawingml/2006/main">
               <a:ext uri="{FF2B5EF4-FFF2-40B4-BE49-F238E27FC236}">
-                <a16:creationId xmlns:a16="http://schemas.microsoft.com/office/drawing/2014/main" id="{947D1E76-E23A-408A-8E90-397D0BE196E3}"/>
+                <a16:creationId xmlns:a16="http://schemas.microsoft.com/office/drawing/2014/main" id="{FB721A65-2FE3-4A8B-961A-21E0B55BC5D9}"/>
               </a:ext>
             </a:extLst>
           </p:cNvPr>
@@ -12521,7 +12529,7 @@
           <p:cNvPr id="16" name="">
             <a:extLst xmlns:a="http://schemas.openxmlformats.org/drawingml/2006/main">
               <a:ext uri="{FF2B5EF4-FFF2-40B4-BE49-F238E27FC236}">
-                <a16:creationId xmlns:a16="http://schemas.microsoft.com/office/drawing/2014/main" id="{223C911B-57E1-439D-A645-0B2B9F54C300}"/>
+                <a16:creationId xmlns:a16="http://schemas.microsoft.com/office/drawing/2014/main" id="{B1974A55-5D8E-489D-888D-286345B6BED8}"/>
               </a:ext>
             </a:extLst>
           </p:cNvPr>
@@ -12578,7 +12586,7 @@
           <p:cNvPr id="17" name="">
             <a:extLst xmlns:a="http://schemas.openxmlformats.org/drawingml/2006/main">
               <a:ext uri="{FF2B5EF4-FFF2-40B4-BE49-F238E27FC236}">
-                <a16:creationId xmlns:a16="http://schemas.microsoft.com/office/drawing/2014/main" id="{C86DAEF0-B0DD-4AB3-932B-47578CCF1E17}"/>
+                <a16:creationId xmlns:a16="http://schemas.microsoft.com/office/drawing/2014/main" id="{3B7BBAC1-2982-4C76-B1E6-A15FE62D3592}"/>
               </a:ext>
             </a:extLst>
           </p:cNvPr>
@@ -12635,7 +12643,7 @@
           <p:cNvPr id="18" name="">
             <a:extLst xmlns:a="http://schemas.openxmlformats.org/drawingml/2006/main">
               <a:ext uri="{FF2B5EF4-FFF2-40B4-BE49-F238E27FC236}">
-                <a16:creationId xmlns:a16="http://schemas.microsoft.com/office/drawing/2014/main" id="{5CD443B1-5CDF-4D6E-A03D-4005FE73039E}"/>
+                <a16:creationId xmlns:a16="http://schemas.microsoft.com/office/drawing/2014/main" id="{41EC3BB2-6F49-40EB-89B1-657F7E6A3E2F}"/>
               </a:ext>
             </a:extLst>
           </p:cNvPr>
@@ -12669,7 +12677,7 @@
           <p:cNvPr id="19" name="">
             <a:extLst xmlns:a="http://schemas.openxmlformats.org/drawingml/2006/main">
               <a:ext uri="{FF2B5EF4-FFF2-40B4-BE49-F238E27FC236}">
-                <a16:creationId xmlns:a16="http://schemas.microsoft.com/office/drawing/2014/main" id="{CDCE8E8A-FA66-4F2A-B683-BE3B86685363}"/>
+                <a16:creationId xmlns:a16="http://schemas.microsoft.com/office/drawing/2014/main" id="{4789FFC4-A0C4-41C6-97C7-7879163F3CC0}"/>
               </a:ext>
             </a:extLst>
           </p:cNvPr>
@@ -12701,7 +12709,7 @@
           <p:cNvPr id="20" name="">
             <a:extLst xmlns:a="http://schemas.openxmlformats.org/drawingml/2006/main">
               <a:ext uri="{FF2B5EF4-FFF2-40B4-BE49-F238E27FC236}">
-                <a16:creationId xmlns:a16="http://schemas.microsoft.com/office/drawing/2014/main" id="{E1EEA0C2-EBEF-4E04-8356-6F3DA042433E}"/>
+                <a16:creationId xmlns:a16="http://schemas.microsoft.com/office/drawing/2014/main" id="{41296E11-93B0-4489-9792-1C03EF760B37}"/>
               </a:ext>
             </a:extLst>
           </p:cNvPr>
@@ -12758,7 +12766,7 @@
           <p:cNvPr id="21" name="">
             <a:extLst xmlns:a="http://schemas.openxmlformats.org/drawingml/2006/main">
               <a:ext uri="{FF2B5EF4-FFF2-40B4-BE49-F238E27FC236}">
-                <a16:creationId xmlns:a16="http://schemas.microsoft.com/office/drawing/2014/main" id="{1C0821BD-76AE-442F-8F95-E1EABAC0DA7C}"/>
+                <a16:creationId xmlns:a16="http://schemas.microsoft.com/office/drawing/2014/main" id="{29057D6A-B264-4EF9-B001-1D8F425C2888}"/>
               </a:ext>
             </a:extLst>
           </p:cNvPr>
@@ -12815,7 +12823,7 @@
           <p:cNvPr id="22" name="">
             <a:extLst xmlns:a="http://schemas.openxmlformats.org/drawingml/2006/main">
               <a:ext uri="{FF2B5EF4-FFF2-40B4-BE49-F238E27FC236}">
-                <a16:creationId xmlns:a16="http://schemas.microsoft.com/office/drawing/2014/main" id="{46E13A2D-A5BA-473E-B365-8FD37579C3FD}"/>
+                <a16:creationId xmlns:a16="http://schemas.microsoft.com/office/drawing/2014/main" id="{26D66F56-F810-4AD3-A411-53AE0C2EFAAC}"/>
               </a:ext>
             </a:extLst>
           </p:cNvPr>
@@ -12870,7 +12878,7 @@
     </p:spTree>
     <p:extLst>
       <p:ext uri="{BB962C8B-B14F-4D97-AF65-F5344CB8AC3E}">
-        <p14:creationId xmlns:p14="http://schemas.microsoft.com/office/powerpoint/2010/main" val="277330859"/>
+        <p14:creationId xmlns:p14="http://schemas.microsoft.com/office/powerpoint/2010/main" val="1108255018"/>
       </p:ext>
     </p:extLst>
   </p:cSld>
@@ -13071,7 +13079,7 @@
           <p:cNvPr id="22" name="">
             <a:extLst xmlns:a="http://schemas.openxmlformats.org/drawingml/2006/main">
               <a:ext uri="{FF2B5EF4-FFF2-40B4-BE49-F238E27FC236}">
-                <a16:creationId xmlns:a16="http://schemas.microsoft.com/office/drawing/2014/main" id="{E39BFDBD-28B2-42AD-831E-9555538ADA1E}"/>
+                <a16:creationId xmlns:a16="http://schemas.microsoft.com/office/drawing/2014/main" id="{158F5F0C-C779-4238-BE5F-1ADDD1EEECD9}"/>
               </a:ext>
             </a:extLst>
           </p:cNvPr>
@@ -13103,7 +13111,7 @@
           <p:cNvPr id="2" name="">
             <a:extLst xmlns:a="http://schemas.openxmlformats.org/drawingml/2006/main">
               <a:ext uri="{FF2B5EF4-FFF2-40B4-BE49-F238E27FC236}">
-                <a16:creationId xmlns:a16="http://schemas.microsoft.com/office/drawing/2014/main" id="{AE5BB388-20C3-4EEB-BED4-209F6CFC86EA}"/>
+                <a16:creationId xmlns:a16="http://schemas.microsoft.com/office/drawing/2014/main" id="{16E3B13D-C7D6-4BC3-BD7D-2D5A3AA2958A}"/>
               </a:ext>
             </a:extLst>
           </p:cNvPr>
@@ -13160,7 +13168,7 @@
           <p:cNvPr id="3" name="">
             <a:extLst xmlns:a="http://schemas.openxmlformats.org/drawingml/2006/main">
               <a:ext uri="{FF2B5EF4-FFF2-40B4-BE49-F238E27FC236}">
-                <a16:creationId xmlns:a16="http://schemas.microsoft.com/office/drawing/2014/main" id="{11FCC2D9-97DF-46A5-BCF6-12ABD20E1BBB}"/>
+                <a16:creationId xmlns:a16="http://schemas.microsoft.com/office/drawing/2014/main" id="{3FF0DED4-6B17-4ADF-B4C0-878C612BB108}"/>
               </a:ext>
             </a:extLst>
           </p:cNvPr>
@@ -13192,7 +13200,7 @@
           <p:cNvPr id="4" name="">
             <a:extLst xmlns:a="http://schemas.openxmlformats.org/drawingml/2006/main">
               <a:ext uri="{FF2B5EF4-FFF2-40B4-BE49-F238E27FC236}">
-                <a16:creationId xmlns:a16="http://schemas.microsoft.com/office/drawing/2014/main" id="{E90909FE-B50E-4CCA-A6DA-F624A594CC08}"/>
+                <a16:creationId xmlns:a16="http://schemas.microsoft.com/office/drawing/2014/main" id="{310104E5-D281-4665-A765-6BB7765845E2}"/>
               </a:ext>
             </a:extLst>
           </p:cNvPr>
@@ -13249,7 +13257,7 @@
           <p:cNvPr id="5" name="">
             <a:extLst xmlns:a="http://schemas.openxmlformats.org/drawingml/2006/main">
               <a:ext uri="{FF2B5EF4-FFF2-40B4-BE49-F238E27FC236}">
-                <a16:creationId xmlns:a16="http://schemas.microsoft.com/office/drawing/2014/main" id="{9DFFA707-75DC-4C0D-B329-969E9639C80C}"/>
+                <a16:creationId xmlns:a16="http://schemas.microsoft.com/office/drawing/2014/main" id="{2847707C-2E89-422E-9389-B89132D35350}"/>
               </a:ext>
             </a:extLst>
           </p:cNvPr>
@@ -13306,7 +13314,7 @@
           <p:cNvPr id="6" name="">
             <a:extLst xmlns:a="http://schemas.openxmlformats.org/drawingml/2006/main">
               <a:ext uri="{FF2B5EF4-FFF2-40B4-BE49-F238E27FC236}">
-                <a16:creationId xmlns:a16="http://schemas.microsoft.com/office/drawing/2014/main" id="{FEF86BCE-DD62-41AB-B937-FBD2C3436DCB}"/>
+                <a16:creationId xmlns:a16="http://schemas.microsoft.com/office/drawing/2014/main" id="{C985CC32-7EE1-42C4-AE2F-8EFF7F8256EA}"/>
               </a:ext>
             </a:extLst>
           </p:cNvPr>
@@ -13363,7 +13371,7 @@
           <p:cNvPr id="7" name="">
             <a:extLst xmlns:a="http://schemas.openxmlformats.org/drawingml/2006/main">
               <a:ext uri="{FF2B5EF4-FFF2-40B4-BE49-F238E27FC236}">
-                <a16:creationId xmlns:a16="http://schemas.microsoft.com/office/drawing/2014/main" id="{5B6AEE1C-7E8F-4776-B470-D9E70CEF985D}"/>
+                <a16:creationId xmlns:a16="http://schemas.microsoft.com/office/drawing/2014/main" id="{FE72F1BA-1AA5-4BED-A00D-F34048EA7960}"/>
               </a:ext>
             </a:extLst>
           </p:cNvPr>
@@ -13395,7 +13403,7 @@
           <p:cNvPr id="8" name="">
             <a:extLst xmlns:a="http://schemas.openxmlformats.org/drawingml/2006/main">
               <a:ext uri="{FF2B5EF4-FFF2-40B4-BE49-F238E27FC236}">
-                <a16:creationId xmlns:a16="http://schemas.microsoft.com/office/drawing/2014/main" id="{B128C8CC-EFC2-4A9A-A2AB-7D3EBB9C0AC5}"/>
+                <a16:creationId xmlns:a16="http://schemas.microsoft.com/office/drawing/2014/main" id="{00200ABD-4775-4240-9ADE-342FFDE2BDC5}"/>
               </a:ext>
             </a:extLst>
           </p:cNvPr>
@@ -13452,7 +13460,7 @@
           <p:cNvPr id="9" name="">
             <a:extLst xmlns:a="http://schemas.openxmlformats.org/drawingml/2006/main">
               <a:ext uri="{FF2B5EF4-FFF2-40B4-BE49-F238E27FC236}">
-                <a16:creationId xmlns:a16="http://schemas.microsoft.com/office/drawing/2014/main" id="{3451C536-0EC9-42CE-A9F0-43E1468A4A13}"/>
+                <a16:creationId xmlns:a16="http://schemas.microsoft.com/office/drawing/2014/main" id="{819A3C11-1876-4695-9308-1E5B070A8B08}"/>
               </a:ext>
             </a:extLst>
           </p:cNvPr>
@@ -13509,7 +13517,7 @@
           <p:cNvPr id="10" name="">
             <a:extLst xmlns:a="http://schemas.openxmlformats.org/drawingml/2006/main">
               <a:ext uri="{FF2B5EF4-FFF2-40B4-BE49-F238E27FC236}">
-                <a16:creationId xmlns:a16="http://schemas.microsoft.com/office/drawing/2014/main" id="{0110F1E2-6E0B-41FB-8A53-6CE20D624783}"/>
+                <a16:creationId xmlns:a16="http://schemas.microsoft.com/office/drawing/2014/main" id="{BF2C79CC-376F-4EBB-8BF7-4A9681BB5454}"/>
               </a:ext>
             </a:extLst>
           </p:cNvPr>
@@ -13543,7 +13551,7 @@
           <p:cNvPr id="11" name="">
             <a:extLst xmlns:a="http://schemas.openxmlformats.org/drawingml/2006/main">
               <a:ext uri="{FF2B5EF4-FFF2-40B4-BE49-F238E27FC236}">
-                <a16:creationId xmlns:a16="http://schemas.microsoft.com/office/drawing/2014/main" id="{1F3D39DB-BC12-4AC7-A75A-83DA6D406AB3}"/>
+                <a16:creationId xmlns:a16="http://schemas.microsoft.com/office/drawing/2014/main" id="{0023ACD1-DF85-48FD-8464-61333B799E25}"/>
               </a:ext>
             </a:extLst>
           </p:cNvPr>
@@ -13575,7 +13583,7 @@
           <p:cNvPr id="12" name="">
             <a:extLst xmlns:a="http://schemas.openxmlformats.org/drawingml/2006/main">
               <a:ext uri="{FF2B5EF4-FFF2-40B4-BE49-F238E27FC236}">
-                <a16:creationId xmlns:a16="http://schemas.microsoft.com/office/drawing/2014/main" id="{E42581F1-21D1-4873-8072-F7E66925948E}"/>
+                <a16:creationId xmlns:a16="http://schemas.microsoft.com/office/drawing/2014/main" id="{2DE40310-7510-493F-A446-30C9316690E9}"/>
               </a:ext>
             </a:extLst>
           </p:cNvPr>
@@ -13632,7 +13640,7 @@
           <p:cNvPr id="13" name="">
             <a:extLst xmlns:a="http://schemas.openxmlformats.org/drawingml/2006/main">
               <a:ext uri="{FF2B5EF4-FFF2-40B4-BE49-F238E27FC236}">
-                <a16:creationId xmlns:a16="http://schemas.microsoft.com/office/drawing/2014/main" id="{5DB28044-C991-469E-A7FF-0E877822F8D4}"/>
+                <a16:creationId xmlns:a16="http://schemas.microsoft.com/office/drawing/2014/main" id="{E7BEE45F-C77E-4040-ACC8-79E5A09258A2}"/>
               </a:ext>
             </a:extLst>
           </p:cNvPr>
@@ -13689,7 +13697,7 @@
           <p:cNvPr id="14" name="">
             <a:extLst xmlns:a="http://schemas.openxmlformats.org/drawingml/2006/main">
               <a:ext uri="{FF2B5EF4-FFF2-40B4-BE49-F238E27FC236}">
-                <a16:creationId xmlns:a16="http://schemas.microsoft.com/office/drawing/2014/main" id="{64A0E01F-64F0-472C-9CD9-7B9D58520DBF}"/>
+                <a16:creationId xmlns:a16="http://schemas.microsoft.com/office/drawing/2014/main" id="{82C4469F-D017-4E5F-9247-1B02F7601740}"/>
               </a:ext>
             </a:extLst>
           </p:cNvPr>
@@ -13723,7 +13731,7 @@
           <p:cNvPr id="15" name="">
             <a:extLst xmlns:a="http://schemas.openxmlformats.org/drawingml/2006/main">
               <a:ext uri="{FF2B5EF4-FFF2-40B4-BE49-F238E27FC236}">
-                <a16:creationId xmlns:a16="http://schemas.microsoft.com/office/drawing/2014/main" id="{CC6A616B-6813-4165-92F5-69B010577CF2}"/>
+                <a16:creationId xmlns:a16="http://schemas.microsoft.com/office/drawing/2014/main" id="{D9067486-8352-4CE1-824E-0E85B9C6136F}"/>
               </a:ext>
             </a:extLst>
           </p:cNvPr>
@@ -13755,7 +13763,7 @@
           <p:cNvPr id="16" name="">
             <a:extLst xmlns:a="http://schemas.openxmlformats.org/drawingml/2006/main">
               <a:ext uri="{FF2B5EF4-FFF2-40B4-BE49-F238E27FC236}">
-                <a16:creationId xmlns:a16="http://schemas.microsoft.com/office/drawing/2014/main" id="{89D365D4-F1A3-4770-84CA-D5C3C8613B39}"/>
+                <a16:creationId xmlns:a16="http://schemas.microsoft.com/office/drawing/2014/main" id="{AC577CEE-9FCC-4CB7-B079-6A001CCD6BF0}"/>
               </a:ext>
             </a:extLst>
           </p:cNvPr>
@@ -13812,7 +13820,7 @@
           <p:cNvPr id="17" name="">
             <a:extLst xmlns:a="http://schemas.openxmlformats.org/drawingml/2006/main">
               <a:ext uri="{FF2B5EF4-FFF2-40B4-BE49-F238E27FC236}">
-                <a16:creationId xmlns:a16="http://schemas.microsoft.com/office/drawing/2014/main" id="{F7DF1DFF-27D5-4DFB-947C-91682212502C}"/>
+                <a16:creationId xmlns:a16="http://schemas.microsoft.com/office/drawing/2014/main" id="{90EBB01A-0234-4606-8851-C84B43A05E70}"/>
               </a:ext>
             </a:extLst>
           </p:cNvPr>
@@ -13869,7 +13877,7 @@
           <p:cNvPr id="18" name="">
             <a:extLst xmlns:a="http://schemas.openxmlformats.org/drawingml/2006/main">
               <a:ext uri="{FF2B5EF4-FFF2-40B4-BE49-F238E27FC236}">
-                <a16:creationId xmlns:a16="http://schemas.microsoft.com/office/drawing/2014/main" id="{7885A837-FC50-458A-8A6F-C48D1A60F2AA}"/>
+                <a16:creationId xmlns:a16="http://schemas.microsoft.com/office/drawing/2014/main" id="{104D7ED1-2366-4281-B4CB-FF4259012FC5}"/>
               </a:ext>
             </a:extLst>
           </p:cNvPr>
@@ -13903,7 +13911,7 @@
           <p:cNvPr id="19" name="">
             <a:extLst xmlns:a="http://schemas.openxmlformats.org/drawingml/2006/main">
               <a:ext uri="{FF2B5EF4-FFF2-40B4-BE49-F238E27FC236}">
-                <a16:creationId xmlns:a16="http://schemas.microsoft.com/office/drawing/2014/main" id="{2CEBFD9E-A38F-4647-87D6-CFB73377AB74}"/>
+                <a16:creationId xmlns:a16="http://schemas.microsoft.com/office/drawing/2014/main" id="{1B8C05A9-4757-45E8-B052-F2FFEFE558A5}"/>
               </a:ext>
             </a:extLst>
           </p:cNvPr>
@@ -13935,7 +13943,7 @@
           <p:cNvPr id="20" name="">
             <a:extLst xmlns:a="http://schemas.openxmlformats.org/drawingml/2006/main">
               <a:ext uri="{FF2B5EF4-FFF2-40B4-BE49-F238E27FC236}">
-                <a16:creationId xmlns:a16="http://schemas.microsoft.com/office/drawing/2014/main" id="{BBE18078-8FE5-4ED3-AE0A-11F5C64E4A2E}"/>
+                <a16:creationId xmlns:a16="http://schemas.microsoft.com/office/drawing/2014/main" id="{0E488B3B-6C13-4E38-B9CA-895A21FAC1F6}"/>
               </a:ext>
             </a:extLst>
           </p:cNvPr>
@@ -13992,7 +14000,7 @@
           <p:cNvPr id="21" name="">
             <a:extLst xmlns:a="http://schemas.openxmlformats.org/drawingml/2006/main">
               <a:ext uri="{FF2B5EF4-FFF2-40B4-BE49-F238E27FC236}">
-                <a16:creationId xmlns:a16="http://schemas.microsoft.com/office/drawing/2014/main" id="{B98B190E-B7CF-456A-9AB3-904BBB3D8D73}"/>
+                <a16:creationId xmlns:a16="http://schemas.microsoft.com/office/drawing/2014/main" id="{BA85CE36-1A28-4D41-B1B4-10A6339E8C4C}"/>
               </a:ext>
             </a:extLst>
           </p:cNvPr>
@@ -14047,7 +14055,7 @@
     </p:spTree>
     <p:extLst>
       <p:ext uri="{BB962C8B-B14F-4D97-AF65-F5344CB8AC3E}">
-        <p14:creationId xmlns:p14="http://schemas.microsoft.com/office/powerpoint/2010/main" val="395358151"/>
+        <p14:creationId xmlns:p14="http://schemas.microsoft.com/office/powerpoint/2010/main" val="1641882393"/>
       </p:ext>
     </p:extLst>
   </p:cSld>
